--- a/docs/week3/state-model-v1.pptx
+++ b/docs/week3/state-model-v1.pptx
@@ -1150,8 +1150,8 @@
         </p:nvSpPr>
         <p:spPr>
           <a:xfrm>
-            <a:off x="731520" y="2103120"/>
-            <a:ext cx="10725912" cy="914400"/>
+            <a:off x="640080" y="2377440"/>
+            <a:ext cx="10881360" cy="914400"/>
           </a:xfrm>
           <a:prstGeom prst="rect">
             <a:avLst/>
@@ -1171,9 +1171,9 @@
                 <a:solidFill>
                   <a:srgbClr val="FFFFFF"/>
                 </a:solidFill>
-                <a:latin typeface="Cambria" pitchFamily="34" charset="0"/>
-                <a:ea typeface="Cambria" pitchFamily="34" charset="-122"/>
-                <a:cs typeface="Cambria" pitchFamily="34" charset="-120"/>
+                <a:latin typeface="Arial" pitchFamily="34" charset="0"/>
+                <a:ea typeface="Arial" pitchFamily="34"/>
+                <a:cs typeface="Arial" pitchFamily="34"/>
               </a:rPr>
               <a:t>Product Return Request</a:t>
             </a:r>
@@ -1189,8 +1189,8 @@
         </p:nvSpPr>
         <p:spPr>
           <a:xfrm>
-            <a:off x="731520" y="2880360"/>
-            <a:ext cx="10725912" cy="640080"/>
+            <a:off x="640080" y="3200400"/>
+            <a:ext cx="10881360" cy="548640"/>
           </a:xfrm>
           <a:prstGeom prst="rect">
             <a:avLst/>
@@ -1206,17 +1206,17 @@
               <a:buNone/>
             </a:pPr>
             <a:r>
-              <a:rPr lang="en-US" sz="2400" dirty="0">
+              <a:rPr lang="en-US" sz="2000" dirty="0">
                 <a:solidFill>
-                  <a:srgbClr val="CADCFC"/>
+                  <a:srgbClr val="0E8C86"/>
                 </a:solidFill>
                 <a:latin typeface="Calibri" pitchFamily="34" charset="0"/>
-                <a:ea typeface="Calibri" pitchFamily="34" charset="-122"/>
-                <a:cs typeface="Calibri" pitchFamily="34" charset="-120"/>
+                <a:ea typeface="Calibri" pitchFamily="34"/>
+                <a:cs typeface="Calibri" pitchFamily="34"/>
               </a:rPr>
               <a:t>State Model</a:t>
             </a:r>
-            <a:endParaRPr lang="en-US" sz="2400" dirty="0"/>
+            <a:endParaRPr lang="en-US" sz="2000" dirty="0"/>
           </a:p>
         </p:txBody>
       </p:sp>
@@ -1228,8 +1228,8 @@
         </p:nvSpPr>
         <p:spPr>
           <a:xfrm>
-            <a:off x="731520" y="3749040"/>
-            <a:ext cx="10725912" cy="731520"/>
+            <a:off x="640080" y="4206240"/>
+            <a:ext cx="10881360" cy="320040"/>
           </a:xfrm>
           <a:prstGeom prst="rect">
             <a:avLst/>
@@ -1242,43 +1242,59 @@
           <a:lstStyle/>
           <a:p>
             <a:pPr indent="0" marL="0">
-              <a:lnSpc>
-                <a:spcPct val="130000"/>
-              </a:lnSpc>
               <a:buNone/>
             </a:pPr>
             <a:r>
-              <a:rPr lang="en-US" sz="1400" dirty="0">
+              <a:rPr lang="en-US" sz="1300" dirty="0">
                 <a:solidFill>
-                  <a:srgbClr val="CADCFC"/>
+                  <a:srgbClr val="AAB0C8"/>
                 </a:solidFill>
                 <a:latin typeface="Calibri" pitchFamily="34" charset="0"/>
-                <a:ea typeface="Calibri" pitchFamily="34" charset="-122"/>
-                <a:cs typeface="Calibri" pitchFamily="34" charset="-120"/>
+                <a:ea typeface="Calibri" pitchFamily="34"/>
+                <a:cs typeface="Calibri" pitchFamily="34"/>
               </a:rPr>
-              <a:t>MIS 3371 • Transaction Processing Systems I • Week 3</a:t>
+              <a:t>MIS 3371  •  Transaction Processing Systems I  •  Week 3</a:t>
             </a:r>
-            <a:endParaRPr lang="en-US" sz="1400" dirty="0"/>
+            <a:endParaRPr lang="en-US" sz="1300" dirty="0"/>
           </a:p>
+        </p:txBody>
+      </p:sp>
+      <p:sp>
+        <p:nvSpPr>
+          <p:cNvPr id="5" name="Text 3"/>
+          <p:cNvSpPr txBox="1"/>
+          <p:nvPr/>
+        </p:nvSpPr>
+        <p:spPr>
+          <a:xfrm>
+            <a:off x="640080" y="4526280"/>
+            <a:ext cx="10881360" cy="320040"/>
+          </a:xfrm>
+          <a:prstGeom prst="rect">
+            <a:avLst/>
+          </a:prstGeom>
+          <a:noFill/>
+          <a:ln/>
+        </p:spPr>
+        <p:txBody>
+          <a:bodyPr wrap="square" lIns="0" tIns="0" rIns="0" bIns="0" rtlCol="0" anchor="ctr"/>
+          <a:lstStyle/>
           <a:p>
             <a:pPr indent="0" marL="0">
-              <a:lnSpc>
-                <a:spcPct val="130000"/>
-              </a:lnSpc>
               <a:buNone/>
             </a:pPr>
             <a:r>
-              <a:rPr lang="en-US" sz="1400" dirty="0">
+              <a:rPr lang="en-US" sz="1300" dirty="0">
                 <a:solidFill>
-                  <a:srgbClr val="CADCFC"/>
+                  <a:srgbClr val="AAB0C8"/>
                 </a:solidFill>
                 <a:latin typeface="Calibri" pitchFamily="34" charset="0"/>
-                <a:ea typeface="Calibri" pitchFamily="34" charset="-122"/>
-                <a:cs typeface="Calibri" pitchFamily="34" charset="-120"/>
+                <a:ea typeface="Calibri" pitchFamily="34"/>
+                <a:cs typeface="Calibri" pitchFamily="34"/>
               </a:rPr>
               <a:t>Product Return Request Team</a:t>
             </a:r>
-            <a:endParaRPr lang="en-US" sz="1400" dirty="0"/>
+            <a:endParaRPr lang="en-US" sz="1300" dirty="0"/>
           </a:p>
         </p:txBody>
       </p:sp>
@@ -1322,8 +1338,8 @@
         </p:nvSpPr>
         <p:spPr>
           <a:xfrm>
-            <a:off x="548640" y="320040"/>
-            <a:ext cx="11091672" cy="548640"/>
+            <a:off x="457200" y="320040"/>
+            <a:ext cx="11247120" cy="548640"/>
           </a:xfrm>
           <a:prstGeom prst="rect">
             <a:avLst/>
@@ -1343,9 +1359,9 @@
                 <a:solidFill>
                   <a:srgbClr val="1E2761"/>
                 </a:solidFill>
-                <a:latin typeface="Cambria" pitchFamily="34" charset="0"/>
-                <a:ea typeface="Cambria" pitchFamily="34" charset="-122"/>
-                <a:cs typeface="Cambria" pitchFamily="34" charset="-120"/>
+                <a:latin typeface="Arial" pitchFamily="34" charset="0"/>
+                <a:ea typeface="Arial" pitchFamily="34"/>
+                <a:cs typeface="Arial" pitchFamily="34"/>
               </a:rPr>
               <a:t>State Definitions</a:t>
             </a:r>
@@ -1361,8 +1377,8 @@
         </p:nvSpPr>
         <p:spPr>
           <a:xfrm>
-            <a:off x="548640" y="868680"/>
-            <a:ext cx="11091672" cy="320040"/>
+            <a:off x="457200" y="868680"/>
+            <a:ext cx="11247120" cy="320040"/>
           </a:xfrm>
           <a:prstGeom prst="rect">
             <a:avLst/>
@@ -1378,17 +1394,17 @@
               <a:buNone/>
             </a:pPr>
             <a:r>
-              <a:rPr lang="en-US" sz="1400" dirty="0">
+              <a:rPr lang="en-US" sz="1300" dirty="0">
                 <a:solidFill>
-                  <a:srgbClr val="555555"/>
+                  <a:srgbClr val="5B6072"/>
                 </a:solidFill>
                 <a:latin typeface="Calibri" pitchFamily="34" charset="0"/>
-                <a:ea typeface="Calibri" pitchFamily="34" charset="-122"/>
-                <a:cs typeface="Calibri" pitchFamily="34" charset="-120"/>
+                <a:ea typeface="Calibri" pitchFamily="34"/>
+                <a:cs typeface="Calibri" pitchFamily="34"/>
               </a:rPr>
               <a:t>5 transaction states</a:t>
             </a:r>
-            <a:endParaRPr lang="en-US" sz="1400" dirty="0"/>
+            <a:endParaRPr lang="en-US" sz="1300" dirty="0"/>
           </a:p>
         </p:txBody>
       </p:sp>
@@ -1407,18 +1423,18 @@
           </p:nvPr>
         </p:nvGraphicFramePr>
         <p:xfrm>
-          <a:off x="548640" y="1463040"/>
-          <a:ext cx="11091672" cy="914400"/>
+          <a:off x="457200" y="1554480"/>
+          <a:ext cx="11247120" cy="914400"/>
         </p:xfrm>
         <a:graphic>
           <a:graphicData uri="http://schemas.openxmlformats.org/drawingml/2006/table">
             <a:tbl>
               <a:tblPr/>
               <a:tblGrid>
-                <a:gridCol w="3017520"/>
-                <a:gridCol w="8074152"/>
+                <a:gridCol w="2926080"/>
+                <a:gridCol w="8321040"/>
               </a:tblGrid>
-              <a:tr h="777240">
+              <a:tr h="0">
                 <a:tc>
                   <a:txBody>
                     <a:bodyPr/>
@@ -1433,8 +1449,8 @@
                             <a:srgbClr val="FFFFFF"/>
                           </a:solidFill>
                           <a:latin typeface="Calibri" pitchFamily="34" charset="0"/>
-                          <a:ea typeface="Calibri" pitchFamily="34" charset="-122"/>
-                          <a:cs typeface="Calibri" pitchFamily="34" charset="-120"/>
+                          <a:ea typeface="Calibri" pitchFamily="34"/>
+                          <a:cs typeface="Calibri" pitchFamily="34"/>
                         </a:rPr>
                         <a:t>State</a:t>
                       </a:r>
@@ -1448,7 +1464,7 @@
                   <a:tcPr marL="91440" marR="91440" marT="45720" marB="45720" anchor="ctr">
                     <a:lnL w="9525" cap="flat" cmpd="sng" algn="ctr">
                       <a:solidFill>
-                        <a:srgbClr val="D9D9D9"/>
+                        <a:srgbClr val="D5D9E0"/>
                       </a:solidFill>
                       <a:prstDash val="solid"/>
                       <a:round/>
@@ -1457,7 +1473,7 @@
                     </a:lnL>
                     <a:lnR w="9525" cap="flat" cmpd="sng" algn="ctr">
                       <a:solidFill>
-                        <a:srgbClr val="D9D9D9"/>
+                        <a:srgbClr val="D5D9E0"/>
                       </a:solidFill>
                       <a:prstDash val="solid"/>
                       <a:round/>
@@ -1466,7 +1482,7 @@
                     </a:lnR>
                     <a:lnT w="9525" cap="flat" cmpd="sng" algn="ctr">
                       <a:solidFill>
-                        <a:srgbClr val="D9D9D9"/>
+                        <a:srgbClr val="D5D9E0"/>
                       </a:solidFill>
                       <a:prstDash val="solid"/>
                       <a:round/>
@@ -1475,7 +1491,7 @@
                     </a:lnT>
                     <a:lnB w="9525" cap="flat" cmpd="sng" algn="ctr">
                       <a:solidFill>
-                        <a:srgbClr val="D9D9D9"/>
+                        <a:srgbClr val="D5D9E0"/>
                       </a:solidFill>
                       <a:prstDash val="solid"/>
                       <a:round/>
@@ -1501,8 +1517,8 @@
                             <a:srgbClr val="FFFFFF"/>
                           </a:solidFill>
                           <a:latin typeface="Calibri" pitchFamily="34" charset="0"/>
-                          <a:ea typeface="Calibri" pitchFamily="34" charset="-122"/>
-                          <a:cs typeface="Calibri" pitchFamily="34" charset="-120"/>
+                          <a:ea typeface="Calibri" pitchFamily="34"/>
+                          <a:cs typeface="Calibri" pitchFamily="34"/>
                         </a:rPr>
                         <a:t>Definition</a:t>
                       </a:r>
@@ -1516,7 +1532,7 @@
                   <a:tcPr marL="91440" marR="91440" marT="45720" marB="45720" anchor="ctr">
                     <a:lnL w="9525" cap="flat" cmpd="sng" algn="ctr">
                       <a:solidFill>
-                        <a:srgbClr val="D9D9D9"/>
+                        <a:srgbClr val="D5D9E0"/>
                       </a:solidFill>
                       <a:prstDash val="solid"/>
                       <a:round/>
@@ -1525,7 +1541,7 @@
                     </a:lnL>
                     <a:lnR w="9525" cap="flat" cmpd="sng" algn="ctr">
                       <a:solidFill>
-                        <a:srgbClr val="D9D9D9"/>
+                        <a:srgbClr val="D5D9E0"/>
                       </a:solidFill>
                       <a:prstDash val="solid"/>
                       <a:round/>
@@ -1534,7 +1550,7 @@
                     </a:lnR>
                     <a:lnT w="9525" cap="flat" cmpd="sng" algn="ctr">
                       <a:solidFill>
-                        <a:srgbClr val="D9D9D9"/>
+                        <a:srgbClr val="D5D9E0"/>
                       </a:solidFill>
                       <a:prstDash val="solid"/>
                       <a:round/>
@@ -1543,7 +1559,7 @@
                     </a:lnT>
                     <a:lnB w="9525" cap="flat" cmpd="sng" algn="ctr">
                       <a:solidFill>
-                        <a:srgbClr val="D9D9D9"/>
+                        <a:srgbClr val="D5D9E0"/>
                       </a:solidFill>
                       <a:prstDash val="solid"/>
                       <a:round/>
@@ -1556,7 +1572,7 @@
                   </a:tcPr>
                 </a:tc>
               </a:tr>
-              <a:tr h="777240">
+              <a:tr h="0">
                 <a:tc>
                   <a:txBody>
                     <a:bodyPr/>
@@ -1566,27 +1582,27 @@
                         <a:buNone/>
                       </a:pPr>
                       <a:r>
-                        <a:rPr lang="en-US" sz="1200" b="1" dirty="0">
+                        <a:rPr lang="en-US" sz="1100" b="1" dirty="0">
                           <a:solidFill>
                             <a:srgbClr val="1E2761"/>
                           </a:solidFill>
-                          <a:latin typeface="Calibri" pitchFamily="34" charset="0"/>
-                          <a:ea typeface="Calibri" pitchFamily="34" charset="-122"/>
-                          <a:cs typeface="Calibri" pitchFamily="34" charset="-120"/>
+                          <a:latin typeface="Courier New" pitchFamily="34" charset="0"/>
+                          <a:ea typeface="Courier New" pitchFamily="34"/>
+                          <a:cs typeface="Courier New" pitchFamily="34"/>
                         </a:rPr>
                         <a:t>Submitted</a:t>
                       </a:r>
-                      <a:endParaRPr lang="en-US" sz="1200" dirty="0">
-                        <a:latin typeface="Calibri" charset="0"/>
-                        <a:ea typeface="Calibri" charset="0"/>
-                        <a:cs typeface="Calibri" charset="0"/>
+                      <a:endParaRPr lang="en-US" sz="1100" dirty="0">
+                        <a:latin typeface="Courier New" charset="0"/>
+                        <a:ea typeface="Courier New" charset="0"/>
+                        <a:cs typeface="Courier New" charset="0"/>
                       </a:endParaRPr>
                     </a:p>
                   </a:txBody>
                   <a:tcPr marL="91440" marR="91440" marT="45720" marB="45720" anchor="ctr">
                     <a:lnL w="9525" cap="flat" cmpd="sng" algn="ctr">
                       <a:solidFill>
-                        <a:srgbClr val="D9D9D9"/>
+                        <a:srgbClr val="D5D9E0"/>
                       </a:solidFill>
                       <a:prstDash val="solid"/>
                       <a:round/>
@@ -1595,7 +1611,7 @@
                     </a:lnL>
                     <a:lnR w="9525" cap="flat" cmpd="sng" algn="ctr">
                       <a:solidFill>
-                        <a:srgbClr val="D9D9D9"/>
+                        <a:srgbClr val="D5D9E0"/>
                       </a:solidFill>
                       <a:prstDash val="solid"/>
                       <a:round/>
@@ -1604,7 +1620,7 @@
                     </a:lnR>
                     <a:lnT w="9525" cap="flat" cmpd="sng" algn="ctr">
                       <a:solidFill>
-                        <a:srgbClr val="D9D9D9"/>
+                        <a:srgbClr val="D5D9E0"/>
                       </a:solidFill>
                       <a:prstDash val="solid"/>
                       <a:round/>
@@ -1613,7 +1629,7 @@
                     </a:lnT>
                     <a:lnB w="9525" cap="flat" cmpd="sng" algn="ctr">
                       <a:solidFill>
-                        <a:srgbClr val="D9D9D9"/>
+                        <a:srgbClr val="D5D9E0"/>
                       </a:solidFill>
                       <a:prstDash val="solid"/>
                       <a:round/>
@@ -1636,11 +1652,11 @@
                       <a:r>
                         <a:rPr lang="en-US" sz="1200" dirty="0">
                           <a:solidFill>
-                            <a:srgbClr val="202020"/>
+                            <a:srgbClr val="222533"/>
                           </a:solidFill>
                           <a:latin typeface="Calibri" pitchFamily="34" charset="0"/>
-                          <a:ea typeface="Calibri" pitchFamily="34" charset="-122"/>
-                          <a:cs typeface="Calibri" pitchFamily="34" charset="-120"/>
+                          <a:ea typeface="Calibri" pitchFamily="34"/>
+                          <a:cs typeface="Calibri" pitchFamily="34"/>
                         </a:rPr>
                         <a:t>Request has been received and passed initial validation; not yet finalized</a:t>
                       </a:r>
@@ -1654,7 +1670,7 @@
                   <a:tcPr marL="91440" marR="91440" marT="45720" marB="45720" anchor="ctr">
                     <a:lnL w="9525" cap="flat" cmpd="sng" algn="ctr">
                       <a:solidFill>
-                        <a:srgbClr val="D9D9D9"/>
+                        <a:srgbClr val="D5D9E0"/>
                       </a:solidFill>
                       <a:prstDash val="solid"/>
                       <a:round/>
@@ -1663,7 +1679,7 @@
                     </a:lnL>
                     <a:lnR w="9525" cap="flat" cmpd="sng" algn="ctr">
                       <a:solidFill>
-                        <a:srgbClr val="D9D9D9"/>
+                        <a:srgbClr val="D5D9E0"/>
                       </a:solidFill>
                       <a:prstDash val="solid"/>
                       <a:round/>
@@ -1672,7 +1688,7 @@
                     </a:lnR>
                     <a:lnT w="9525" cap="flat" cmpd="sng" algn="ctr">
                       <a:solidFill>
-                        <a:srgbClr val="D9D9D9"/>
+                        <a:srgbClr val="D5D9E0"/>
                       </a:solidFill>
                       <a:prstDash val="solid"/>
                       <a:round/>
@@ -1681,7 +1697,7 @@
                     </a:lnT>
                     <a:lnB w="9525" cap="flat" cmpd="sng" algn="ctr">
                       <a:solidFill>
-                        <a:srgbClr val="D9D9D9"/>
+                        <a:srgbClr val="D5D9E0"/>
                       </a:solidFill>
                       <a:prstDash val="solid"/>
                       <a:round/>
@@ -1694,7 +1710,7 @@
                   </a:tcPr>
                 </a:tc>
               </a:tr>
-              <a:tr h="777240">
+              <a:tr h="0">
                 <a:tc>
                   <a:txBody>
                     <a:bodyPr/>
@@ -1704,27 +1720,27 @@
                         <a:buNone/>
                       </a:pPr>
                       <a:r>
-                        <a:rPr lang="en-US" sz="1200" b="1" dirty="0">
+                        <a:rPr lang="en-US" sz="1100" b="1" dirty="0">
                           <a:solidFill>
                             <a:srgbClr val="1E2761"/>
                           </a:solidFill>
-                          <a:latin typeface="Calibri" pitchFamily="34" charset="0"/>
-                          <a:ea typeface="Calibri" pitchFamily="34" charset="-122"/>
-                          <a:cs typeface="Calibri" pitchFamily="34" charset="-120"/>
+                          <a:latin typeface="Courier New" pitchFamily="34" charset="0"/>
+                          <a:ea typeface="Courier New" pitchFamily="34"/>
+                          <a:cs typeface="Courier New" pitchFamily="34"/>
                         </a:rPr>
                         <a:t>Pending Supervisor Review</a:t>
                       </a:r>
-                      <a:endParaRPr lang="en-US" sz="1200" dirty="0">
-                        <a:latin typeface="Calibri" charset="0"/>
-                        <a:ea typeface="Calibri" charset="0"/>
-                        <a:cs typeface="Calibri" charset="0"/>
+                      <a:endParaRPr lang="en-US" sz="1100" dirty="0">
+                        <a:latin typeface="Courier New" charset="0"/>
+                        <a:ea typeface="Courier New" charset="0"/>
+                        <a:cs typeface="Courier New" charset="0"/>
                       </a:endParaRPr>
                     </a:p>
                   </a:txBody>
                   <a:tcPr marL="91440" marR="91440" marT="45720" marB="45720" anchor="ctr">
                     <a:lnL w="9525" cap="flat" cmpd="sng" algn="ctr">
                       <a:solidFill>
-                        <a:srgbClr val="D9D9D9"/>
+                        <a:srgbClr val="D5D9E0"/>
                       </a:solidFill>
                       <a:prstDash val="solid"/>
                       <a:round/>
@@ -1733,7 +1749,7 @@
                     </a:lnL>
                     <a:lnR w="9525" cap="flat" cmpd="sng" algn="ctr">
                       <a:solidFill>
-                        <a:srgbClr val="D9D9D9"/>
+                        <a:srgbClr val="D5D9E0"/>
                       </a:solidFill>
                       <a:prstDash val="solid"/>
                       <a:round/>
@@ -1742,7 +1758,7 @@
                     </a:lnR>
                     <a:lnT w="9525" cap="flat" cmpd="sng" algn="ctr">
                       <a:solidFill>
-                        <a:srgbClr val="D9D9D9"/>
+                        <a:srgbClr val="D5D9E0"/>
                       </a:solidFill>
                       <a:prstDash val="solid"/>
                       <a:round/>
@@ -1751,7 +1767,7 @@
                     </a:lnT>
                     <a:lnB w="9525" cap="flat" cmpd="sng" algn="ctr">
                       <a:solidFill>
-                        <a:srgbClr val="D9D9D9"/>
+                        <a:srgbClr val="D5D9E0"/>
                       </a:solidFill>
                       <a:prstDash val="solid"/>
                       <a:round/>
@@ -1759,7 +1775,7 @@
                       <a:tailEnd type="none" w="med" len="med"/>
                     </a:lnB>
                     <a:solidFill>
-                      <a:srgbClr val="F4F6FC"/>
+                      <a:srgbClr val="F7F8FA"/>
                     </a:solidFill>
                   </a:tcPr>
                 </a:tc>
@@ -1774,11 +1790,11 @@
                       <a:r>
                         <a:rPr lang="en-US" sz="1200" dirty="0">
                           <a:solidFill>
-                            <a:srgbClr val="202020"/>
+                            <a:srgbClr val="222533"/>
                           </a:solidFill>
                           <a:latin typeface="Calibri" pitchFamily="34" charset="0"/>
-                          <a:ea typeface="Calibri" pitchFamily="34" charset="-122"/>
-                          <a:cs typeface="Calibri" pitchFamily="34" charset="-120"/>
+                          <a:ea typeface="Calibri" pitchFamily="34"/>
+                          <a:cs typeface="Calibri" pitchFamily="34"/>
                         </a:rPr>
                         <a:t>High-value defective return awaiting supervisor decision</a:t>
                       </a:r>
@@ -1792,7 +1808,7 @@
                   <a:tcPr marL="91440" marR="91440" marT="45720" marB="45720" anchor="ctr">
                     <a:lnL w="9525" cap="flat" cmpd="sng" algn="ctr">
                       <a:solidFill>
-                        <a:srgbClr val="D9D9D9"/>
+                        <a:srgbClr val="D5D9E0"/>
                       </a:solidFill>
                       <a:prstDash val="solid"/>
                       <a:round/>
@@ -1801,7 +1817,7 @@
                     </a:lnL>
                     <a:lnR w="9525" cap="flat" cmpd="sng" algn="ctr">
                       <a:solidFill>
-                        <a:srgbClr val="D9D9D9"/>
+                        <a:srgbClr val="D5D9E0"/>
                       </a:solidFill>
                       <a:prstDash val="solid"/>
                       <a:round/>
@@ -1810,7 +1826,7 @@
                     </a:lnR>
                     <a:lnT w="9525" cap="flat" cmpd="sng" algn="ctr">
                       <a:solidFill>
-                        <a:srgbClr val="D9D9D9"/>
+                        <a:srgbClr val="D5D9E0"/>
                       </a:solidFill>
                       <a:prstDash val="solid"/>
                       <a:round/>
@@ -1819,7 +1835,7 @@
                     </a:lnT>
                     <a:lnB w="9525" cap="flat" cmpd="sng" algn="ctr">
                       <a:solidFill>
-                        <a:srgbClr val="D9D9D9"/>
+                        <a:srgbClr val="D5D9E0"/>
                       </a:solidFill>
                       <a:prstDash val="solid"/>
                       <a:round/>
@@ -1827,12 +1843,12 @@
                       <a:tailEnd type="none" w="med" len="med"/>
                     </a:lnB>
                     <a:solidFill>
-                      <a:srgbClr val="F4F6FC"/>
+                      <a:srgbClr val="F7F8FA"/>
                     </a:solidFill>
                   </a:tcPr>
                 </a:tc>
               </a:tr>
-              <a:tr h="777240">
+              <a:tr h="0">
                 <a:tc>
                   <a:txBody>
                     <a:bodyPr/>
@@ -1842,27 +1858,27 @@
                         <a:buNone/>
                       </a:pPr>
                       <a:r>
-                        <a:rPr lang="en-US" sz="1200" b="1" dirty="0">
+                        <a:rPr lang="en-US" sz="1100" b="1" dirty="0">
                           <a:solidFill>
                             <a:srgbClr val="1E2761"/>
                           </a:solidFill>
-                          <a:latin typeface="Calibri" pitchFamily="34" charset="0"/>
-                          <a:ea typeface="Calibri" pitchFamily="34" charset="-122"/>
-                          <a:cs typeface="Calibri" pitchFamily="34" charset="-120"/>
+                          <a:latin typeface="Courier New" pitchFamily="34" charset="0"/>
+                          <a:ea typeface="Courier New" pitchFamily="34"/>
+                          <a:cs typeface="Courier New" pitchFamily="34"/>
                         </a:rPr>
                         <a:t>Approved</a:t>
                       </a:r>
-                      <a:endParaRPr lang="en-US" sz="1200" dirty="0">
-                        <a:latin typeface="Calibri" charset="0"/>
-                        <a:ea typeface="Calibri" charset="0"/>
-                        <a:cs typeface="Calibri" charset="0"/>
+                      <a:endParaRPr lang="en-US" sz="1100" dirty="0">
+                        <a:latin typeface="Courier New" charset="0"/>
+                        <a:ea typeface="Courier New" charset="0"/>
+                        <a:cs typeface="Courier New" charset="0"/>
                       </a:endParaRPr>
                     </a:p>
                   </a:txBody>
                   <a:tcPr marL="91440" marR="91440" marT="45720" marB="45720" anchor="ctr">
                     <a:lnL w="9525" cap="flat" cmpd="sng" algn="ctr">
                       <a:solidFill>
-                        <a:srgbClr val="D9D9D9"/>
+                        <a:srgbClr val="D5D9E0"/>
                       </a:solidFill>
                       <a:prstDash val="solid"/>
                       <a:round/>
@@ -1871,7 +1887,7 @@
                     </a:lnL>
                     <a:lnR w="9525" cap="flat" cmpd="sng" algn="ctr">
                       <a:solidFill>
-                        <a:srgbClr val="D9D9D9"/>
+                        <a:srgbClr val="D5D9E0"/>
                       </a:solidFill>
                       <a:prstDash val="solid"/>
                       <a:round/>
@@ -1880,7 +1896,7 @@
                     </a:lnR>
                     <a:lnT w="9525" cap="flat" cmpd="sng" algn="ctr">
                       <a:solidFill>
-                        <a:srgbClr val="D9D9D9"/>
+                        <a:srgbClr val="D5D9E0"/>
                       </a:solidFill>
                       <a:prstDash val="solid"/>
                       <a:round/>
@@ -1889,7 +1905,7 @@
                     </a:lnT>
                     <a:lnB w="9525" cap="flat" cmpd="sng" algn="ctr">
                       <a:solidFill>
-                        <a:srgbClr val="D9D9D9"/>
+                        <a:srgbClr val="D5D9E0"/>
                       </a:solidFill>
                       <a:prstDash val="solid"/>
                       <a:round/>
@@ -1912,11 +1928,11 @@
                       <a:r>
                         <a:rPr lang="en-US" sz="1200" dirty="0">
                           <a:solidFill>
-                            <a:srgbClr val="202020"/>
+                            <a:srgbClr val="222533"/>
                           </a:solidFill>
                           <a:latin typeface="Calibri" pitchFamily="34" charset="0"/>
-                          <a:ea typeface="Calibri" pitchFamily="34" charset="-122"/>
-                          <a:cs typeface="Calibri" pitchFamily="34" charset="-120"/>
+                          <a:ea typeface="Calibri" pitchFamily="34"/>
+                          <a:cs typeface="Calibri" pitchFamily="34"/>
                         </a:rPr>
                         <a:t>Request is accepted for standard processing (auto-approved or supervisor-approved)</a:t>
                       </a:r>
@@ -1930,7 +1946,7 @@
                   <a:tcPr marL="91440" marR="91440" marT="45720" marB="45720" anchor="ctr">
                     <a:lnL w="9525" cap="flat" cmpd="sng" algn="ctr">
                       <a:solidFill>
-                        <a:srgbClr val="D9D9D9"/>
+                        <a:srgbClr val="D5D9E0"/>
                       </a:solidFill>
                       <a:prstDash val="solid"/>
                       <a:round/>
@@ -1939,7 +1955,7 @@
                     </a:lnL>
                     <a:lnR w="9525" cap="flat" cmpd="sng" algn="ctr">
                       <a:solidFill>
-                        <a:srgbClr val="D9D9D9"/>
+                        <a:srgbClr val="D5D9E0"/>
                       </a:solidFill>
                       <a:prstDash val="solid"/>
                       <a:round/>
@@ -1948,7 +1964,7 @@
                     </a:lnR>
                     <a:lnT w="9525" cap="flat" cmpd="sng" algn="ctr">
                       <a:solidFill>
-                        <a:srgbClr val="D9D9D9"/>
+                        <a:srgbClr val="D5D9E0"/>
                       </a:solidFill>
                       <a:prstDash val="solid"/>
                       <a:round/>
@@ -1957,7 +1973,7 @@
                     </a:lnT>
                     <a:lnB w="9525" cap="flat" cmpd="sng" algn="ctr">
                       <a:solidFill>
-                        <a:srgbClr val="D9D9D9"/>
+                        <a:srgbClr val="D5D9E0"/>
                       </a:solidFill>
                       <a:prstDash val="solid"/>
                       <a:round/>
@@ -1970,7 +1986,7 @@
                   </a:tcPr>
                 </a:tc>
               </a:tr>
-              <a:tr h="777240">
+              <a:tr h="0">
                 <a:tc>
                   <a:txBody>
                     <a:bodyPr/>
@@ -1980,27 +1996,27 @@
                         <a:buNone/>
                       </a:pPr>
                       <a:r>
-                        <a:rPr lang="en-US" sz="1200" b="1" dirty="0">
+                        <a:rPr lang="en-US" sz="1100" b="1" dirty="0">
                           <a:solidFill>
                             <a:srgbClr val="1E2761"/>
                           </a:solidFill>
-                          <a:latin typeface="Calibri" pitchFamily="34" charset="0"/>
-                          <a:ea typeface="Calibri" pitchFamily="34" charset="-122"/>
-                          <a:cs typeface="Calibri" pitchFamily="34" charset="-120"/>
+                          <a:latin typeface="Courier New" pitchFamily="34" charset="0"/>
+                          <a:ea typeface="Courier New" pitchFamily="34"/>
+                          <a:cs typeface="Courier New" pitchFamily="34"/>
                         </a:rPr>
                         <a:t>Rejected</a:t>
                       </a:r>
-                      <a:endParaRPr lang="en-US" sz="1200" dirty="0">
-                        <a:latin typeface="Calibri" charset="0"/>
-                        <a:ea typeface="Calibri" charset="0"/>
-                        <a:cs typeface="Calibri" charset="0"/>
+                      <a:endParaRPr lang="en-US" sz="1100" dirty="0">
+                        <a:latin typeface="Courier New" charset="0"/>
+                        <a:ea typeface="Courier New" charset="0"/>
+                        <a:cs typeface="Courier New" charset="0"/>
                       </a:endParaRPr>
                     </a:p>
                   </a:txBody>
                   <a:tcPr marL="91440" marR="91440" marT="45720" marB="45720" anchor="ctr">
                     <a:lnL w="9525" cap="flat" cmpd="sng" algn="ctr">
                       <a:solidFill>
-                        <a:srgbClr val="D9D9D9"/>
+                        <a:srgbClr val="D5D9E0"/>
                       </a:solidFill>
                       <a:prstDash val="solid"/>
                       <a:round/>
@@ -2009,7 +2025,7 @@
                     </a:lnL>
                     <a:lnR w="9525" cap="flat" cmpd="sng" algn="ctr">
                       <a:solidFill>
-                        <a:srgbClr val="D9D9D9"/>
+                        <a:srgbClr val="D5D9E0"/>
                       </a:solidFill>
                       <a:prstDash val="solid"/>
                       <a:round/>
@@ -2018,7 +2034,7 @@
                     </a:lnR>
                     <a:lnT w="9525" cap="flat" cmpd="sng" algn="ctr">
                       <a:solidFill>
-                        <a:srgbClr val="D9D9D9"/>
+                        <a:srgbClr val="D5D9E0"/>
                       </a:solidFill>
                       <a:prstDash val="solid"/>
                       <a:round/>
@@ -2027,7 +2043,7 @@
                     </a:lnT>
                     <a:lnB w="9525" cap="flat" cmpd="sng" algn="ctr">
                       <a:solidFill>
-                        <a:srgbClr val="D9D9D9"/>
+                        <a:srgbClr val="D5D9E0"/>
                       </a:solidFill>
                       <a:prstDash val="solid"/>
                       <a:round/>
@@ -2035,7 +2051,7 @@
                       <a:tailEnd type="none" w="med" len="med"/>
                     </a:lnB>
                     <a:solidFill>
-                      <a:srgbClr val="F4F6FC"/>
+                      <a:srgbClr val="F7F8FA"/>
                     </a:solidFill>
                   </a:tcPr>
                 </a:tc>
@@ -2050,11 +2066,11 @@
                       <a:r>
                         <a:rPr lang="en-US" sz="1200" dirty="0">
                           <a:solidFill>
-                            <a:srgbClr val="202020"/>
+                            <a:srgbClr val="222533"/>
                           </a:solidFill>
                           <a:latin typeface="Calibri" pitchFamily="34" charset="0"/>
-                          <a:ea typeface="Calibri" pitchFamily="34" charset="-122"/>
-                          <a:cs typeface="Calibri" pitchFamily="34" charset="-120"/>
+                          <a:ea typeface="Calibri" pitchFamily="34"/>
+                          <a:cs typeface="Calibri" pitchFamily="34"/>
                         </a:rPr>
                         <a:t>Request was declined, either automatically (policy violation) or by supervisor</a:t>
                       </a:r>
@@ -2068,7 +2084,7 @@
                   <a:tcPr marL="91440" marR="91440" marT="45720" marB="45720" anchor="ctr">
                     <a:lnL w="9525" cap="flat" cmpd="sng" algn="ctr">
                       <a:solidFill>
-                        <a:srgbClr val="D9D9D9"/>
+                        <a:srgbClr val="D5D9E0"/>
                       </a:solidFill>
                       <a:prstDash val="solid"/>
                       <a:round/>
@@ -2077,7 +2093,7 @@
                     </a:lnL>
                     <a:lnR w="9525" cap="flat" cmpd="sng" algn="ctr">
                       <a:solidFill>
-                        <a:srgbClr val="D9D9D9"/>
+                        <a:srgbClr val="D5D9E0"/>
                       </a:solidFill>
                       <a:prstDash val="solid"/>
                       <a:round/>
@@ -2086,7 +2102,7 @@
                     </a:lnR>
                     <a:lnT w="9525" cap="flat" cmpd="sng" algn="ctr">
                       <a:solidFill>
-                        <a:srgbClr val="D9D9D9"/>
+                        <a:srgbClr val="D5D9E0"/>
                       </a:solidFill>
                       <a:prstDash val="solid"/>
                       <a:round/>
@@ -2095,7 +2111,7 @@
                     </a:lnT>
                     <a:lnB w="9525" cap="flat" cmpd="sng" algn="ctr">
                       <a:solidFill>
-                        <a:srgbClr val="D9D9D9"/>
+                        <a:srgbClr val="D5D9E0"/>
                       </a:solidFill>
                       <a:prstDash val="solid"/>
                       <a:round/>
@@ -2103,12 +2119,12 @@
                       <a:tailEnd type="none" w="med" len="med"/>
                     </a:lnB>
                     <a:solidFill>
-                      <a:srgbClr val="F4F6FC"/>
+                      <a:srgbClr val="F7F8FA"/>
                     </a:solidFill>
                   </a:tcPr>
                 </a:tc>
               </a:tr>
-              <a:tr h="777240">
+              <a:tr h="0">
                 <a:tc>
                   <a:txBody>
                     <a:bodyPr/>
@@ -2118,27 +2134,27 @@
                         <a:buNone/>
                       </a:pPr>
                       <a:r>
-                        <a:rPr lang="en-US" sz="1200" b="1" dirty="0">
+                        <a:rPr lang="en-US" sz="1100" b="1" dirty="0">
                           <a:solidFill>
                             <a:srgbClr val="1E2761"/>
                           </a:solidFill>
-                          <a:latin typeface="Calibri" pitchFamily="34" charset="0"/>
-                          <a:ea typeface="Calibri" pitchFamily="34" charset="-122"/>
-                          <a:cs typeface="Calibri" pitchFamily="34" charset="-120"/>
+                          <a:latin typeface="Courier New" pitchFamily="34" charset="0"/>
+                          <a:ea typeface="Courier New" pitchFamily="34"/>
+                          <a:cs typeface="Courier New" pitchFamily="34"/>
                         </a:rPr>
                         <a:t>Completed</a:t>
                       </a:r>
-                      <a:endParaRPr lang="en-US" sz="1200" dirty="0">
-                        <a:latin typeface="Calibri" charset="0"/>
-                        <a:ea typeface="Calibri" charset="0"/>
-                        <a:cs typeface="Calibri" charset="0"/>
+                      <a:endParaRPr lang="en-US" sz="1100" dirty="0">
+                        <a:latin typeface="Courier New" charset="0"/>
+                        <a:ea typeface="Courier New" charset="0"/>
+                        <a:cs typeface="Courier New" charset="0"/>
                       </a:endParaRPr>
                     </a:p>
                   </a:txBody>
                   <a:tcPr marL="91440" marR="91440" marT="45720" marB="45720" anchor="ctr">
                     <a:lnL w="9525" cap="flat" cmpd="sng" algn="ctr">
                       <a:solidFill>
-                        <a:srgbClr val="D9D9D9"/>
+                        <a:srgbClr val="D5D9E0"/>
                       </a:solidFill>
                       <a:prstDash val="solid"/>
                       <a:round/>
@@ -2147,7 +2163,7 @@
                     </a:lnL>
                     <a:lnR w="9525" cap="flat" cmpd="sng" algn="ctr">
                       <a:solidFill>
-                        <a:srgbClr val="D9D9D9"/>
+                        <a:srgbClr val="D5D9E0"/>
                       </a:solidFill>
                       <a:prstDash val="solid"/>
                       <a:round/>
@@ -2156,7 +2172,7 @@
                     </a:lnR>
                     <a:lnT w="9525" cap="flat" cmpd="sng" algn="ctr">
                       <a:solidFill>
-                        <a:srgbClr val="D9D9D9"/>
+                        <a:srgbClr val="D5D9E0"/>
                       </a:solidFill>
                       <a:prstDash val="solid"/>
                       <a:round/>
@@ -2165,7 +2181,7 @@
                     </a:lnT>
                     <a:lnB w="9525" cap="flat" cmpd="sng" algn="ctr">
                       <a:solidFill>
-                        <a:srgbClr val="D9D9D9"/>
+                        <a:srgbClr val="D5D9E0"/>
                       </a:solidFill>
                       <a:prstDash val="solid"/>
                       <a:round/>
@@ -2188,11 +2204,11 @@
                       <a:r>
                         <a:rPr lang="en-US" sz="1200" dirty="0">
                           <a:solidFill>
-                            <a:srgbClr val="202020"/>
+                            <a:srgbClr val="222533"/>
                           </a:solidFill>
                           <a:latin typeface="Calibri" pitchFamily="34" charset="0"/>
-                          <a:ea typeface="Calibri" pitchFamily="34" charset="-122"/>
-                          <a:cs typeface="Calibri" pitchFamily="34" charset="-120"/>
+                          <a:ea typeface="Calibri" pitchFamily="34"/>
+                          <a:cs typeface="Calibri" pitchFamily="34"/>
                         </a:rPr>
                         <a:t>Approved request has been fulfilled (item returned / resolution issued)</a:t>
                       </a:r>
@@ -2206,7 +2222,7 @@
                   <a:tcPr marL="91440" marR="91440" marT="45720" marB="45720" anchor="ctr">
                     <a:lnL w="9525" cap="flat" cmpd="sng" algn="ctr">
                       <a:solidFill>
-                        <a:srgbClr val="D9D9D9"/>
+                        <a:srgbClr val="D5D9E0"/>
                       </a:solidFill>
                       <a:prstDash val="solid"/>
                       <a:round/>
@@ -2215,7 +2231,7 @@
                     </a:lnL>
                     <a:lnR w="9525" cap="flat" cmpd="sng" algn="ctr">
                       <a:solidFill>
-                        <a:srgbClr val="D9D9D9"/>
+                        <a:srgbClr val="D5D9E0"/>
                       </a:solidFill>
                       <a:prstDash val="solid"/>
                       <a:round/>
@@ -2224,7 +2240,7 @@
                     </a:lnR>
                     <a:lnT w="9525" cap="flat" cmpd="sng" algn="ctr">
                       <a:solidFill>
-                        <a:srgbClr val="D9D9D9"/>
+                        <a:srgbClr val="D5D9E0"/>
                       </a:solidFill>
                       <a:prstDash val="solid"/>
                       <a:round/>
@@ -2233,7 +2249,7 @@
                     </a:lnT>
                     <a:lnB w="9525" cap="flat" cmpd="sng" algn="ctr">
                       <a:solidFill>
-                        <a:srgbClr val="D9D9D9"/>
+                        <a:srgbClr val="D5D9E0"/>
                       </a:solidFill>
                       <a:prstDash val="solid"/>
                       <a:round/>
@@ -2290,8 +2306,8 @@
         </p:nvSpPr>
         <p:spPr>
           <a:xfrm>
-            <a:off x="548640" y="320040"/>
-            <a:ext cx="11091672" cy="548640"/>
+            <a:off x="457200" y="320040"/>
+            <a:ext cx="11247120" cy="548640"/>
           </a:xfrm>
           <a:prstGeom prst="rect">
             <a:avLst/>
@@ -2311,9 +2327,9 @@
                 <a:solidFill>
                   <a:srgbClr val="1E2761"/>
                 </a:solidFill>
-                <a:latin typeface="Cambria" pitchFamily="34" charset="0"/>
-                <a:ea typeface="Cambria" pitchFamily="34" charset="-122"/>
-                <a:cs typeface="Cambria" pitchFamily="34" charset="-120"/>
+                <a:latin typeface="Arial" pitchFamily="34" charset="0"/>
+                <a:ea typeface="Arial" pitchFamily="34"/>
+                <a:cs typeface="Arial" pitchFamily="34"/>
               </a:rPr>
               <a:t>State Transition Diagram</a:t>
             </a:r>
@@ -2329,30 +2345,23 @@
         </p:nvSpPr>
         <p:spPr>
           <a:xfrm>
-            <a:off x="822960" y="1554480"/>
-            <a:ext cx="1737360" cy="685800"/>
+            <a:off x="548640" y="2377440"/>
+            <a:ext cx="1920240" cy="822960"/>
           </a:xfrm>
           <a:prstGeom prst="roundRect">
             <a:avLst>
-              <a:gd name="adj" fmla="val 13333"/>
+              <a:gd name="adj" fmla="val 6111"/>
             </a:avLst>
           </a:prstGeom>
           <a:solidFill>
-            <a:srgbClr val="CADCFC"/>
+            <a:srgbClr val="1E2761"/>
           </a:solidFill>
-          <a:ln w="15875">
+          <a:ln w="12700">
             <a:solidFill>
-              <a:srgbClr val="1E2761"/>
+              <a:srgbClr val="D5D9E0"/>
             </a:solidFill>
             <a:prstDash val="solid"/>
           </a:ln>
-          <a:effectLst>
-            <a:outerShdw sx="100000" sy="100000" kx="0" ky="0" algn="bl" rotWithShape="0" blurRad="38100" dist="25400" dir="5400000">
-              <a:srgbClr val="000000">
-                <a:alpha val="18000"/>
-              </a:srgbClr>
-            </a:outerShdw>
-          </a:effectLst>
         </p:spPr>
       </p:sp>
       <p:sp>
@@ -2363,8 +2372,8 @@
         </p:nvSpPr>
         <p:spPr>
           <a:xfrm>
-            <a:off x="822960" y="1554480"/>
-            <a:ext cx="1737360" cy="685800"/>
+            <a:off x="548640" y="2377440"/>
+            <a:ext cx="1920240" cy="822960"/>
           </a:xfrm>
           <a:prstGeom prst="rect">
             <a:avLst/>
@@ -2373,7 +2382,7 @@
           <a:ln/>
         </p:spPr>
         <p:txBody>
-          <a:bodyPr wrap="square" lIns="25400" tIns="25400" rIns="25400" bIns="25400" rtlCol="0" anchor="ctr"/>
+          <a:bodyPr wrap="square" lIns="0" tIns="0" rIns="0" bIns="0" rtlCol="0" anchor="ctr"/>
           <a:lstStyle/>
           <a:p>
             <a:pPr algn="ctr" indent="0" marL="0">
@@ -2382,11 +2391,11 @@
             <a:r>
               <a:rPr lang="en-US" sz="1200" b="1" dirty="0">
                 <a:solidFill>
-                  <a:srgbClr val="202020"/>
+                  <a:srgbClr val="FFFFFF"/>
                 </a:solidFill>
                 <a:latin typeface="Calibri" pitchFamily="34" charset="0"/>
-                <a:ea typeface="Calibri" pitchFamily="34" charset="-122"/>
-                <a:cs typeface="Calibri" pitchFamily="34" charset="-120"/>
+                <a:ea typeface="Calibri" pitchFamily="34"/>
+                <a:cs typeface="Calibri" pitchFamily="34"/>
               </a:rPr>
               <a:t>Submitted</a:t>
             </a:r>
@@ -2402,30 +2411,23 @@
         </p:nvSpPr>
         <p:spPr>
           <a:xfrm>
-            <a:off x="3931920" y="1554480"/>
-            <a:ext cx="2377440" cy="685800"/>
+            <a:off x="3108960" y="2377440"/>
+            <a:ext cx="2377440" cy="822960"/>
           </a:xfrm>
           <a:prstGeom prst="roundRect">
             <a:avLst>
-              <a:gd name="adj" fmla="val 13333"/>
+              <a:gd name="adj" fmla="val 6111"/>
             </a:avLst>
           </a:prstGeom>
           <a:solidFill>
-            <a:srgbClr val="FFF3CD"/>
+            <a:srgbClr val="E7E9F3"/>
           </a:solidFill>
-          <a:ln w="15875">
+          <a:ln w="12700">
             <a:solidFill>
               <a:srgbClr val="1E2761"/>
             </a:solidFill>
             <a:prstDash val="solid"/>
           </a:ln>
-          <a:effectLst>
-            <a:outerShdw sx="100000" sy="100000" kx="0" ky="0" algn="bl" rotWithShape="0" blurRad="38100" dist="25400" dir="5400000">
-              <a:srgbClr val="000000">
-                <a:alpha val="18000"/>
-              </a:srgbClr>
-            </a:outerShdw>
-          </a:effectLst>
         </p:spPr>
       </p:sp>
       <p:sp>
@@ -2436,8 +2438,8 @@
         </p:nvSpPr>
         <p:spPr>
           <a:xfrm>
-            <a:off x="3931920" y="1554480"/>
-            <a:ext cx="2377440" cy="685800"/>
+            <a:off x="3108960" y="2377440"/>
+            <a:ext cx="2377440" cy="822960"/>
           </a:xfrm>
           <a:prstGeom prst="rect">
             <a:avLst/>
@@ -2446,7 +2448,7 @@
           <a:ln/>
         </p:spPr>
         <p:txBody>
-          <a:bodyPr wrap="square" lIns="25400" tIns="25400" rIns="25400" bIns="25400" rtlCol="0" anchor="ctr"/>
+          <a:bodyPr wrap="square" lIns="0" tIns="0" rIns="0" bIns="0" rtlCol="0" anchor="ctr"/>
           <a:lstStyle/>
           <a:p>
             <a:pPr algn="ctr" indent="0" marL="0">
@@ -2455,11 +2457,11 @@
             <a:r>
               <a:rPr lang="en-US" sz="1200" b="1" dirty="0">
                 <a:solidFill>
-                  <a:srgbClr val="8A6D00"/>
+                  <a:srgbClr val="1E2761"/>
                 </a:solidFill>
                 <a:latin typeface="Calibri" pitchFamily="34" charset="0"/>
-                <a:ea typeface="Calibri" pitchFamily="34" charset="-122"/>
-                <a:cs typeface="Calibri" pitchFamily="34" charset="-120"/>
+                <a:ea typeface="Calibri" pitchFamily="34"/>
+                <a:cs typeface="Calibri" pitchFamily="34"/>
               </a:rPr>
               <a:t>Pending Supervisor</a:t>
             </a:r>
@@ -2472,11 +2474,11 @@
             <a:r>
               <a:rPr lang="en-US" sz="1200" b="1" dirty="0">
                 <a:solidFill>
-                  <a:srgbClr val="8A6D00"/>
+                  <a:srgbClr val="1E2761"/>
                 </a:solidFill>
                 <a:latin typeface="Calibri" pitchFamily="34" charset="0"/>
-                <a:ea typeface="Calibri" pitchFamily="34" charset="-122"/>
-                <a:cs typeface="Calibri" pitchFamily="34" charset="-120"/>
+                <a:ea typeface="Calibri" pitchFamily="34"/>
+                <a:cs typeface="Calibri" pitchFamily="34"/>
               </a:rPr>
               <a:t>Review</a:t>
             </a:r>
@@ -2492,30 +2494,23 @@
         </p:nvSpPr>
         <p:spPr>
           <a:xfrm>
-            <a:off x="7680960" y="1554480"/>
-            <a:ext cx="1737360" cy="685800"/>
+            <a:off x="6126480" y="2377440"/>
+            <a:ext cx="1920240" cy="822960"/>
           </a:xfrm>
           <a:prstGeom prst="roundRect">
             <a:avLst>
-              <a:gd name="adj" fmla="val 13333"/>
+              <a:gd name="adj" fmla="val 6111"/>
             </a:avLst>
           </a:prstGeom>
           <a:solidFill>
-            <a:srgbClr val="E4F2EB"/>
+            <a:srgbClr val="0E8C86"/>
           </a:solidFill>
-          <a:ln w="15875">
+          <a:ln w="12700">
             <a:solidFill>
-              <a:srgbClr val="1E2761"/>
+              <a:srgbClr val="D5D9E0"/>
             </a:solidFill>
             <a:prstDash val="solid"/>
           </a:ln>
-          <a:effectLst>
-            <a:outerShdw sx="100000" sy="100000" kx="0" ky="0" algn="bl" rotWithShape="0" blurRad="38100" dist="25400" dir="5400000">
-              <a:srgbClr val="000000">
-                <a:alpha val="18000"/>
-              </a:srgbClr>
-            </a:outerShdw>
-          </a:effectLst>
         </p:spPr>
       </p:sp>
       <p:sp>
@@ -2526,8 +2521,8 @@
         </p:nvSpPr>
         <p:spPr>
           <a:xfrm>
-            <a:off x="7680960" y="1554480"/>
-            <a:ext cx="1737360" cy="685800"/>
+            <a:off x="6126480" y="2377440"/>
+            <a:ext cx="1920240" cy="822960"/>
           </a:xfrm>
           <a:prstGeom prst="rect">
             <a:avLst/>
@@ -2536,7 +2531,7 @@
           <a:ln/>
         </p:spPr>
         <p:txBody>
-          <a:bodyPr wrap="square" lIns="25400" tIns="25400" rIns="25400" bIns="25400" rtlCol="0" anchor="ctr"/>
+          <a:bodyPr wrap="square" lIns="0" tIns="0" rIns="0" bIns="0" rtlCol="0" anchor="ctr"/>
           <a:lstStyle/>
           <a:p>
             <a:pPr algn="ctr" indent="0" marL="0">
@@ -2545,11 +2540,11 @@
             <a:r>
               <a:rPr lang="en-US" sz="1200" b="1" dirty="0">
                 <a:solidFill>
-                  <a:srgbClr val="1E6B4E"/>
+                  <a:srgbClr val="FFFFFF"/>
                 </a:solidFill>
                 <a:latin typeface="Calibri" pitchFamily="34" charset="0"/>
-                <a:ea typeface="Calibri" pitchFamily="34" charset="-122"/>
-                <a:cs typeface="Calibri" pitchFamily="34" charset="-120"/>
+                <a:ea typeface="Calibri" pitchFamily="34"/>
+                <a:cs typeface="Calibri" pitchFamily="34"/>
               </a:rPr>
               <a:t>Approved</a:t>
             </a:r>
@@ -2565,30 +2560,23 @@
         </p:nvSpPr>
         <p:spPr>
           <a:xfrm>
-            <a:off x="10332720" y="1554480"/>
-            <a:ext cx="1554480" cy="685800"/>
+            <a:off x="8686800" y="2377440"/>
+            <a:ext cx="1920240" cy="822960"/>
           </a:xfrm>
           <a:prstGeom prst="roundRect">
             <a:avLst>
-              <a:gd name="adj" fmla="val 13333"/>
+              <a:gd name="adj" fmla="val 6111"/>
             </a:avLst>
           </a:prstGeom>
           <a:solidFill>
-            <a:srgbClr val="E4F2EB"/>
+            <a:srgbClr val="0E8C86"/>
           </a:solidFill>
-          <a:ln w="15875">
+          <a:ln w="12700">
             <a:solidFill>
-              <a:srgbClr val="1E2761"/>
+              <a:srgbClr val="D5D9E0"/>
             </a:solidFill>
             <a:prstDash val="solid"/>
           </a:ln>
-          <a:effectLst>
-            <a:outerShdw sx="100000" sy="100000" kx="0" ky="0" algn="bl" rotWithShape="0" blurRad="38100" dist="25400" dir="5400000">
-              <a:srgbClr val="000000">
-                <a:alpha val="18000"/>
-              </a:srgbClr>
-            </a:outerShdw>
-          </a:effectLst>
         </p:spPr>
       </p:sp>
       <p:sp>
@@ -2599,8 +2587,8 @@
         </p:nvSpPr>
         <p:spPr>
           <a:xfrm>
-            <a:off x="10332720" y="1554480"/>
-            <a:ext cx="1554480" cy="685800"/>
+            <a:off x="8686800" y="2377440"/>
+            <a:ext cx="1920240" cy="822960"/>
           </a:xfrm>
           <a:prstGeom prst="rect">
             <a:avLst/>
@@ -2609,7 +2597,7 @@
           <a:ln/>
         </p:spPr>
         <p:txBody>
-          <a:bodyPr wrap="square" lIns="25400" tIns="25400" rIns="25400" bIns="25400" rtlCol="0" anchor="ctr"/>
+          <a:bodyPr wrap="square" lIns="0" tIns="0" rIns="0" bIns="0" rtlCol="0" anchor="ctr"/>
           <a:lstStyle/>
           <a:p>
             <a:pPr algn="ctr" indent="0" marL="0">
@@ -2618,11 +2606,11 @@
             <a:r>
               <a:rPr lang="en-US" sz="1200" b="1" dirty="0">
                 <a:solidFill>
-                  <a:srgbClr val="1E6B4E"/>
+                  <a:srgbClr val="FFFFFF"/>
                 </a:solidFill>
                 <a:latin typeface="Calibri" pitchFamily="34" charset="0"/>
-                <a:ea typeface="Calibri" pitchFamily="34" charset="-122"/>
-                <a:cs typeface="Calibri" pitchFamily="34" charset="-120"/>
+                <a:ea typeface="Calibri" pitchFamily="34"/>
+                <a:cs typeface="Calibri" pitchFamily="34"/>
               </a:rPr>
               <a:t>Completed</a:t>
             </a:r>
@@ -2638,30 +2626,23 @@
         </p:nvSpPr>
         <p:spPr>
           <a:xfrm>
-            <a:off x="3931920" y="3383280"/>
-            <a:ext cx="2377440" cy="685800"/>
+            <a:off x="3108960" y="4206240"/>
+            <a:ext cx="2377440" cy="822960"/>
           </a:xfrm>
           <a:prstGeom prst="roundRect">
             <a:avLst>
-              <a:gd name="adj" fmla="val 13333"/>
+              <a:gd name="adj" fmla="val 6111"/>
             </a:avLst>
           </a:prstGeom>
           <a:solidFill>
-            <a:srgbClr val="FBE4E8"/>
+            <a:srgbClr val="FFFFFF"/>
           </a:solidFill>
-          <a:ln w="15875">
+          <a:ln w="12700">
             <a:solidFill>
               <a:srgbClr val="1E2761"/>
             </a:solidFill>
             <a:prstDash val="solid"/>
           </a:ln>
-          <a:effectLst>
-            <a:outerShdw sx="100000" sy="100000" kx="0" ky="0" algn="bl" rotWithShape="0" blurRad="38100" dist="25400" dir="5400000">
-              <a:srgbClr val="000000">
-                <a:alpha val="18000"/>
-              </a:srgbClr>
-            </a:outerShdw>
-          </a:effectLst>
         </p:spPr>
       </p:sp>
       <p:sp>
@@ -2672,8 +2653,8 @@
         </p:nvSpPr>
         <p:spPr>
           <a:xfrm>
-            <a:off x="3931920" y="3383280"/>
-            <a:ext cx="2377440" cy="685800"/>
+            <a:off x="3108960" y="4206240"/>
+            <a:ext cx="2377440" cy="822960"/>
           </a:xfrm>
           <a:prstGeom prst="rect">
             <a:avLst/>
@@ -2682,7 +2663,7 @@
           <a:ln/>
         </p:spPr>
         <p:txBody>
-          <a:bodyPr wrap="square" lIns="25400" tIns="25400" rIns="25400" bIns="25400" rtlCol="0" anchor="ctr"/>
+          <a:bodyPr wrap="square" lIns="0" tIns="0" rIns="0" bIns="0" rtlCol="0" anchor="ctr"/>
           <a:lstStyle/>
           <a:p>
             <a:pPr algn="ctr" indent="0" marL="0">
@@ -2691,11 +2672,11 @@
             <a:r>
               <a:rPr lang="en-US" sz="1200" b="1" dirty="0">
                 <a:solidFill>
-                  <a:srgbClr val="9B1B30"/>
+                  <a:srgbClr val="1E2761"/>
                 </a:solidFill>
                 <a:latin typeface="Calibri" pitchFamily="34" charset="0"/>
-                <a:ea typeface="Calibri" pitchFamily="34" charset="-122"/>
-                <a:cs typeface="Calibri" pitchFamily="34" charset="-120"/>
+                <a:ea typeface="Calibri" pitchFamily="34"/>
+                <a:cs typeface="Calibri" pitchFamily="34"/>
               </a:rPr>
               <a:t>Rejected</a:t>
             </a:r>
@@ -2711,16 +2692,16 @@
         </p:nvSpPr>
         <p:spPr>
           <a:xfrm>
-            <a:off x="2560320" y="1897380"/>
-            <a:ext cx="1371600" cy="0"/>
+            <a:off x="2468880" y="2788920"/>
+            <a:ext cx="640080" cy="9144"/>
           </a:xfrm>
           <a:prstGeom prst="line">
             <a:avLst/>
           </a:prstGeom>
           <a:noFill/>
-          <a:ln w="19050">
+          <a:ln w="12700">
             <a:solidFill>
-              <a:srgbClr val="8A6D00"/>
+              <a:srgbClr val="1E2761"/>
             </a:solidFill>
             <a:prstDash val="solid"/>
             <a:tailEnd type="triangle"/>
@@ -2735,8 +2716,8 @@
         </p:nvSpPr>
         <p:spPr>
           <a:xfrm>
-            <a:off x="2606040" y="1513332"/>
-            <a:ext cx="1280160" cy="320040"/>
+            <a:off x="2468880" y="2103120"/>
+            <a:ext cx="640080" cy="228600"/>
           </a:xfrm>
           <a:prstGeom prst="rect">
             <a:avLst/>
@@ -2752,17 +2733,17 @@
               <a:buNone/>
             </a:pPr>
             <a:r>
-              <a:rPr lang="en-US" sz="900" dirty="0">
+              <a:rPr lang="en-US" sz="1000" b="1" dirty="0">
                 <a:solidFill>
-                  <a:srgbClr val="8A6D00"/>
+                  <a:srgbClr val="1E2761"/>
                 </a:solidFill>
                 <a:latin typeface="Calibri" pitchFamily="34" charset="0"/>
-                <a:ea typeface="Calibri" pitchFamily="34" charset="-122"/>
-                <a:cs typeface="Calibri" pitchFamily="34" charset="-120"/>
+                <a:ea typeface="Calibri" pitchFamily="34"/>
+                <a:cs typeface="Calibri" pitchFamily="34"/>
               </a:rPr>
               <a:t>defective item &gt; $200</a:t>
             </a:r>
-            <a:endParaRPr lang="en-US" sz="900" dirty="0"/>
+            <a:endParaRPr lang="en-US" sz="1000" dirty="0"/>
           </a:p>
         </p:txBody>
       </p:sp>
@@ -2774,16 +2755,16 @@
         </p:nvSpPr>
         <p:spPr>
           <a:xfrm>
-            <a:off x="6309360" y="1897380"/>
-            <a:ext cx="1371600" cy="0"/>
+            <a:off x="5486400" y="2788920"/>
+            <a:ext cx="640080" cy="9144"/>
           </a:xfrm>
           <a:prstGeom prst="line">
             <a:avLst/>
           </a:prstGeom>
           <a:noFill/>
-          <a:ln w="19050">
+          <a:ln w="12700">
             <a:solidFill>
-              <a:srgbClr val="1E6B4E"/>
+              <a:srgbClr val="0E8C86"/>
             </a:solidFill>
             <a:prstDash val="solid"/>
             <a:tailEnd type="triangle"/>
@@ -2798,8 +2779,8 @@
         </p:nvSpPr>
         <p:spPr>
           <a:xfrm>
-            <a:off x="6355080" y="1513332"/>
-            <a:ext cx="1280160" cy="320040"/>
+            <a:off x="5486400" y="2103120"/>
+            <a:ext cx="640080" cy="228600"/>
           </a:xfrm>
           <a:prstGeom prst="rect">
             <a:avLst/>
@@ -2815,17 +2796,17 @@
               <a:buNone/>
             </a:pPr>
             <a:r>
-              <a:rPr lang="en-US" sz="900" dirty="0">
+              <a:rPr lang="en-US" sz="1000" b="1" dirty="0">
                 <a:solidFill>
-                  <a:srgbClr val="1E6B4E"/>
+                  <a:srgbClr val="0E8C86"/>
                 </a:solidFill>
                 <a:latin typeface="Calibri" pitchFamily="34" charset="0"/>
-                <a:ea typeface="Calibri" pitchFamily="34" charset="-122"/>
-                <a:cs typeface="Calibri" pitchFamily="34" charset="-120"/>
+                <a:ea typeface="Calibri" pitchFamily="34"/>
+                <a:cs typeface="Calibri" pitchFamily="34"/>
               </a:rPr>
               <a:t>supervisor approves</a:t>
             </a:r>
-            <a:endParaRPr lang="en-US" sz="900" dirty="0"/>
+            <a:endParaRPr lang="en-US" sz="1000" dirty="0"/>
           </a:p>
         </p:txBody>
       </p:sp>
@@ -2837,16 +2818,16 @@
         </p:nvSpPr>
         <p:spPr>
           <a:xfrm>
-            <a:off x="9418320" y="1897380"/>
-            <a:ext cx="914400" cy="0"/>
+            <a:off x="8046720" y="2788920"/>
+            <a:ext cx="640080" cy="9144"/>
           </a:xfrm>
           <a:prstGeom prst="line">
             <a:avLst/>
           </a:prstGeom>
           <a:noFill/>
-          <a:ln w="19050">
+          <a:ln w="12700">
             <a:solidFill>
-              <a:srgbClr val="1E6B4E"/>
+              <a:srgbClr val="0E8C86"/>
             </a:solidFill>
             <a:prstDash val="solid"/>
             <a:tailEnd type="triangle"/>
@@ -2861,8 +2842,8 @@
         </p:nvSpPr>
         <p:spPr>
           <a:xfrm>
-            <a:off x="9326880" y="2286000"/>
-            <a:ext cx="1645920" cy="274320"/>
+            <a:off x="8046720" y="3246120"/>
+            <a:ext cx="640080" cy="228600"/>
           </a:xfrm>
           <a:prstGeom prst="rect">
             <a:avLst/>
@@ -2874,38 +2855,38 @@
           <a:bodyPr wrap="square" lIns="0" tIns="0" rIns="0" bIns="0" rtlCol="0" anchor="ctr"/>
           <a:lstStyle/>
           <a:p>
-            <a:pPr algn="l" indent="0" marL="0">
+            <a:pPr algn="ctr" indent="0" marL="0">
               <a:buNone/>
             </a:pPr>
             <a:r>
-              <a:rPr lang="en-US" sz="900" dirty="0">
+              <a:rPr lang="en-US" sz="1000" b="1" dirty="0">
                 <a:solidFill>
-                  <a:srgbClr val="1E6B4E"/>
+                  <a:srgbClr val="0E8C86"/>
                 </a:solidFill>
                 <a:latin typeface="Calibri" pitchFamily="34" charset="0"/>
-                <a:ea typeface="Calibri" pitchFamily="34" charset="-122"/>
-                <a:cs typeface="Calibri" pitchFamily="34" charset="-120"/>
+                <a:ea typeface="Calibri" pitchFamily="34"/>
+                <a:cs typeface="Calibri" pitchFamily="34"/>
               </a:rPr>
               <a:t>item returned /</a:t>
             </a:r>
-            <a:endParaRPr lang="en-US" sz="900" dirty="0"/>
+            <a:endParaRPr lang="en-US" sz="1000" dirty="0"/>
           </a:p>
           <a:p>
-            <a:pPr algn="l" indent="0" marL="0">
+            <a:pPr algn="ctr" indent="0" marL="0">
               <a:buNone/>
             </a:pPr>
             <a:r>
-              <a:rPr lang="en-US" sz="900" dirty="0">
+              <a:rPr lang="en-US" sz="1000" b="1" dirty="0">
                 <a:solidFill>
-                  <a:srgbClr val="1E6B4E"/>
+                  <a:srgbClr val="0E8C86"/>
                 </a:solidFill>
                 <a:latin typeface="Calibri" pitchFamily="34" charset="0"/>
-                <a:ea typeface="Calibri" pitchFamily="34" charset="-122"/>
-                <a:cs typeface="Calibri" pitchFamily="34" charset="-120"/>
+                <a:ea typeface="Calibri" pitchFamily="34"/>
+                <a:cs typeface="Calibri" pitchFamily="34"/>
               </a:rPr>
               <a:t>resolution issued</a:t>
             </a:r>
-            <a:endParaRPr lang="en-US" sz="900" dirty="0"/>
+            <a:endParaRPr lang="en-US" sz="1000" dirty="0"/>
           </a:p>
         </p:txBody>
       </p:sp>
@@ -2917,64 +2898,16 @@
         </p:nvSpPr>
         <p:spPr>
           <a:xfrm>
-            <a:off x="1737360" y="1554480"/>
-            <a:ext cx="0" cy="-457200"/>
+            <a:off x="4297680" y="3200400"/>
+            <a:ext cx="9144" cy="1005840"/>
           </a:xfrm>
           <a:prstGeom prst="line">
             <a:avLst/>
           </a:prstGeom>
           <a:noFill/>
-          <a:ln w="19050">
+          <a:ln w="12700">
             <a:solidFill>
-              <a:srgbClr val="1E6B4E"/>
-            </a:solidFill>
-            <a:prstDash val="solid"/>
-            <a:tailEnd type="none"/>
-          </a:ln>
-        </p:spPr>
-      </p:sp>
-      <p:sp>
-        <p:nvSpPr>
-          <p:cNvPr id="20" name="Shape 18"/>
-          <p:cNvSpPr/>
-          <p:nvPr/>
-        </p:nvSpPr>
-        <p:spPr>
-          <a:xfrm>
-            <a:off x="1737360" y="1097280"/>
-            <a:ext cx="6812280" cy="0"/>
-          </a:xfrm>
-          <a:prstGeom prst="line">
-            <a:avLst/>
-          </a:prstGeom>
-          <a:noFill/>
-          <a:ln w="19050">
-            <a:solidFill>
-              <a:srgbClr val="1E6B4E"/>
-            </a:solidFill>
-            <a:prstDash val="solid"/>
-            <a:tailEnd type="none"/>
-          </a:ln>
-        </p:spPr>
-      </p:sp>
-      <p:sp>
-        <p:nvSpPr>
-          <p:cNvPr id="21" name="Shape 19"/>
-          <p:cNvSpPr/>
-          <p:nvPr/>
-        </p:nvSpPr>
-        <p:spPr>
-          <a:xfrm>
-            <a:off x="8549640" y="1097280"/>
-            <a:ext cx="0" cy="457200"/>
-          </a:xfrm>
-          <a:prstGeom prst="line">
-            <a:avLst/>
-          </a:prstGeom>
-          <a:noFill/>
-          <a:ln w="19050">
-            <a:solidFill>
-              <a:srgbClr val="1E6B4E"/>
+              <a:srgbClr val="1E2761"/>
             </a:solidFill>
             <a:prstDash val="solid"/>
             <a:tailEnd type="triangle"/>
@@ -2983,14 +2916,14 @@
       </p:sp>
       <p:sp>
         <p:nvSpPr>
-          <p:cNvPr id="22" name="Text 20"/>
+          <p:cNvPr id="20" name="Text 18"/>
           <p:cNvSpPr txBox="1"/>
           <p:nvPr/>
         </p:nvSpPr>
         <p:spPr>
           <a:xfrm>
-            <a:off x="2560320" y="841248"/>
-            <a:ext cx="3840480" cy="274320"/>
+            <a:off x="4434840" y="3584448"/>
+            <a:ext cx="1828800" cy="228600"/>
           </a:xfrm>
           <a:prstGeom prst="rect">
             <a:avLst/>
@@ -3002,90 +2935,42 @@
           <a:bodyPr wrap="square" lIns="0" tIns="0" rIns="0" bIns="0" rtlCol="0" anchor="ctr"/>
           <a:lstStyle/>
           <a:p>
-            <a:pPr algn="l" indent="0" marL="0">
+            <a:pPr indent="0" marL="0">
               <a:buNone/>
             </a:pPr>
             <a:r>
-              <a:rPr lang="en-US" sz="900" dirty="0">
+              <a:rPr lang="en-US" sz="1000" b="1" dirty="0">
                 <a:solidFill>
-                  <a:srgbClr val="1E6B4E"/>
+                  <a:srgbClr val="1E2761"/>
                 </a:solidFill>
                 <a:latin typeface="Calibri" pitchFamily="34" charset="0"/>
-                <a:ea typeface="Calibri" pitchFamily="34" charset="-122"/>
-                <a:cs typeface="Calibri" pitchFamily="34" charset="-120"/>
+                <a:ea typeface="Calibri" pitchFamily="34"/>
+                <a:cs typeface="Calibri" pitchFamily="34"/>
               </a:rPr>
-              <a:t>passes validation, no supervisor required</a:t>
+              <a:t>supervisor rejects</a:t>
             </a:r>
-            <a:endParaRPr lang="en-US" sz="900" dirty="0"/>
+            <a:endParaRPr lang="en-US" sz="1000" dirty="0"/>
           </a:p>
         </p:txBody>
       </p:sp>
       <p:sp>
         <p:nvSpPr>
-          <p:cNvPr id="23" name="Shape 21"/>
+          <p:cNvPr id="21" name="Shape 19"/>
           <p:cNvSpPr/>
           <p:nvPr/>
         </p:nvSpPr>
         <p:spPr>
           <a:xfrm>
-            <a:off x="1691640" y="2240280"/>
-            <a:ext cx="0" cy="411480"/>
+            <a:off x="1508760" y="3200400"/>
+            <a:ext cx="9144" cy="594360"/>
           </a:xfrm>
           <a:prstGeom prst="line">
             <a:avLst/>
           </a:prstGeom>
           <a:noFill/>
-          <a:ln w="19050">
+          <a:ln w="12700">
             <a:solidFill>
-              <a:srgbClr val="9B1B30"/>
-            </a:solidFill>
-            <a:prstDash val="solid"/>
-            <a:tailEnd type="none"/>
-          </a:ln>
-        </p:spPr>
-      </p:sp>
-      <p:sp>
-        <p:nvSpPr>
-          <p:cNvPr id="24" name="Shape 22"/>
-          <p:cNvSpPr/>
-          <p:nvPr/>
-        </p:nvSpPr>
-        <p:spPr>
-          <a:xfrm>
-            <a:off x="1691640" y="2651760"/>
-            <a:ext cx="3429000" cy="0"/>
-          </a:xfrm>
-          <a:prstGeom prst="line">
-            <a:avLst/>
-          </a:prstGeom>
-          <a:noFill/>
-          <a:ln w="19050">
-            <a:solidFill>
-              <a:srgbClr val="9B1B30"/>
-            </a:solidFill>
-            <a:prstDash val="solid"/>
-            <a:tailEnd type="none"/>
-          </a:ln>
-        </p:spPr>
-      </p:sp>
-      <p:sp>
-        <p:nvSpPr>
-          <p:cNvPr id="25" name="Shape 23"/>
-          <p:cNvSpPr/>
-          <p:nvPr/>
-        </p:nvSpPr>
-        <p:spPr>
-          <a:xfrm>
-            <a:off x="5120640" y="2651760"/>
-            <a:ext cx="0" cy="731520"/>
-          </a:xfrm>
-          <a:prstGeom prst="line">
-            <a:avLst/>
-          </a:prstGeom>
-          <a:noFill/>
-          <a:ln w="19050">
-            <a:solidFill>
-              <a:srgbClr val="9B1B30"/>
+              <a:srgbClr val="1E2761"/>
             </a:solidFill>
             <a:prstDash val="solid"/>
             <a:tailEnd type="triangle"/>
@@ -3094,14 +2979,38 @@
       </p:sp>
       <p:sp>
         <p:nvSpPr>
-          <p:cNvPr id="26" name="Text 24"/>
+          <p:cNvPr id="22" name="Shape 20"/>
+          <p:cNvSpPr/>
+          <p:nvPr/>
+        </p:nvSpPr>
+        <p:spPr>
+          <a:xfrm>
+            <a:off x="1508760" y="3794760"/>
+            <a:ext cx="2788920" cy="9144"/>
+          </a:xfrm>
+          <a:prstGeom prst="line">
+            <a:avLst/>
+          </a:prstGeom>
+          <a:noFill/>
+          <a:ln w="12700">
+            <a:solidFill>
+              <a:srgbClr val="1E2761"/>
+            </a:solidFill>
+            <a:prstDash val="solid"/>
+            <a:tailEnd type="triangle"/>
+          </a:ln>
+        </p:spPr>
+      </p:sp>
+      <p:sp>
+        <p:nvSpPr>
+          <p:cNvPr id="23" name="Text 21"/>
           <p:cNvSpPr txBox="1"/>
           <p:nvPr/>
         </p:nvSpPr>
         <p:spPr>
           <a:xfrm>
-            <a:off x="1828800" y="2331720"/>
-            <a:ext cx="2743200" cy="274320"/>
+            <a:off x="1508760" y="3520440"/>
+            <a:ext cx="2788920" cy="228600"/>
           </a:xfrm>
           <a:prstGeom prst="rect">
             <a:avLst/>
@@ -3113,42 +3022,42 @@
           <a:bodyPr wrap="square" lIns="0" tIns="0" rIns="0" bIns="0" rtlCol="0" anchor="ctr"/>
           <a:lstStyle/>
           <a:p>
-            <a:pPr algn="l" indent="0" marL="0">
+            <a:pPr algn="ctr" indent="0" marL="0">
               <a:buNone/>
             </a:pPr>
             <a:r>
-              <a:rPr lang="en-US" sz="900" dirty="0">
+              <a:rPr lang="en-US" sz="1000" b="1" dirty="0">
                 <a:solidFill>
-                  <a:srgbClr val="9B1B30"/>
+                  <a:srgbClr val="1E2761"/>
                 </a:solidFill>
                 <a:latin typeface="Calibri" pitchFamily="34" charset="0"/>
-                <a:ea typeface="Calibri" pitchFamily="34" charset="-122"/>
-                <a:cs typeface="Calibri" pitchFamily="34" charset="-120"/>
+                <a:ea typeface="Calibri" pitchFamily="34"/>
+                <a:cs typeface="Calibri" pitchFamily="34"/>
               </a:rPr>
               <a:t>fails 30-day / final-sale / qty check</a:t>
             </a:r>
-            <a:endParaRPr lang="en-US" sz="900" dirty="0"/>
+            <a:endParaRPr lang="en-US" sz="1000" dirty="0"/>
           </a:p>
         </p:txBody>
       </p:sp>
       <p:sp>
         <p:nvSpPr>
-          <p:cNvPr id="27" name="Shape 25"/>
+          <p:cNvPr id="24" name="Shape 22"/>
           <p:cNvSpPr/>
           <p:nvPr/>
         </p:nvSpPr>
         <p:spPr>
           <a:xfrm>
-            <a:off x="5120640" y="2240280"/>
-            <a:ext cx="0" cy="1143000"/>
+            <a:off x="4297680" y="3794760"/>
+            <a:ext cx="9144" cy="411480"/>
           </a:xfrm>
           <a:prstGeom prst="line">
             <a:avLst/>
           </a:prstGeom>
           <a:noFill/>
-          <a:ln w="19050">
+          <a:ln w="12700">
             <a:solidFill>
-              <a:srgbClr val="9B1B30"/>
+              <a:srgbClr val="1E2761"/>
             </a:solidFill>
             <a:prstDash val="solid"/>
             <a:tailEnd type="triangle"/>
@@ -3157,14 +3066,62 @@
       </p:sp>
       <p:sp>
         <p:nvSpPr>
-          <p:cNvPr id="28" name="Text 26"/>
+          <p:cNvPr id="25" name="Shape 23"/>
+          <p:cNvSpPr/>
+          <p:nvPr/>
+        </p:nvSpPr>
+        <p:spPr>
+          <a:xfrm flipV="1">
+            <a:off x="1508760" y="1600200"/>
+            <a:ext cx="9144" cy="777240"/>
+          </a:xfrm>
+          <a:prstGeom prst="line">
+            <a:avLst/>
+          </a:prstGeom>
+          <a:noFill/>
+          <a:ln w="12700">
+            <a:solidFill>
+              <a:srgbClr val="0E8C86"/>
+            </a:solidFill>
+            <a:prstDash val="solid"/>
+            <a:tailEnd type="triangle"/>
+          </a:ln>
+        </p:spPr>
+      </p:sp>
+      <p:sp>
+        <p:nvSpPr>
+          <p:cNvPr id="26" name="Shape 24"/>
+          <p:cNvSpPr/>
+          <p:nvPr/>
+        </p:nvSpPr>
+        <p:spPr>
+          <a:xfrm>
+            <a:off x="1508760" y="1600200"/>
+            <a:ext cx="5577840" cy="9144"/>
+          </a:xfrm>
+          <a:prstGeom prst="line">
+            <a:avLst/>
+          </a:prstGeom>
+          <a:noFill/>
+          <a:ln w="12700">
+            <a:solidFill>
+              <a:srgbClr val="0E8C86"/>
+            </a:solidFill>
+            <a:prstDash val="solid"/>
+            <a:tailEnd type="triangle"/>
+          </a:ln>
+        </p:spPr>
+      </p:sp>
+      <p:sp>
+        <p:nvSpPr>
+          <p:cNvPr id="27" name="Text 25"/>
           <p:cNvSpPr txBox="1"/>
           <p:nvPr/>
         </p:nvSpPr>
         <p:spPr>
           <a:xfrm>
-            <a:off x="5257800" y="2674620"/>
-            <a:ext cx="1554480" cy="274320"/>
+            <a:off x="1508760" y="1325880"/>
+            <a:ext cx="5577840" cy="228600"/>
           </a:xfrm>
           <a:prstGeom prst="rect">
             <a:avLst/>
@@ -3176,23 +3133,47 @@
           <a:bodyPr wrap="square" lIns="0" tIns="0" rIns="0" bIns="0" rtlCol="0" anchor="ctr"/>
           <a:lstStyle/>
           <a:p>
-            <a:pPr algn="l" indent="0" marL="0">
+            <a:pPr algn="ctr" indent="0" marL="0">
               <a:buNone/>
             </a:pPr>
             <a:r>
-              <a:rPr lang="en-US" sz="900" dirty="0">
+              <a:rPr lang="en-US" sz="1000" b="1" dirty="0">
                 <a:solidFill>
-                  <a:srgbClr val="9B1B30"/>
+                  <a:srgbClr val="0E8C86"/>
                 </a:solidFill>
                 <a:latin typeface="Calibri" pitchFamily="34" charset="0"/>
-                <a:ea typeface="Calibri" pitchFamily="34" charset="-122"/>
-                <a:cs typeface="Calibri" pitchFamily="34" charset="-120"/>
+                <a:ea typeface="Calibri" pitchFamily="34"/>
+                <a:cs typeface="Calibri" pitchFamily="34"/>
               </a:rPr>
-              <a:t>supervisor rejects</a:t>
+              <a:t>passes validation, no supervisor required</a:t>
             </a:r>
-            <a:endParaRPr lang="en-US" sz="900" dirty="0"/>
+            <a:endParaRPr lang="en-US" sz="1000" dirty="0"/>
           </a:p>
         </p:txBody>
+      </p:sp>
+      <p:sp>
+        <p:nvSpPr>
+          <p:cNvPr id="28" name="Shape 26"/>
+          <p:cNvSpPr/>
+          <p:nvPr/>
+        </p:nvSpPr>
+        <p:spPr>
+          <a:xfrm>
+            <a:off x="7086600" y="1600200"/>
+            <a:ext cx="9144" cy="777240"/>
+          </a:xfrm>
+          <a:prstGeom prst="line">
+            <a:avLst/>
+          </a:prstGeom>
+          <a:noFill/>
+          <a:ln w="12700">
+            <a:solidFill>
+              <a:srgbClr val="0E8C86"/>
+            </a:solidFill>
+            <a:prstDash val="solid"/>
+            <a:tailEnd type="triangle"/>
+          </a:ln>
+        </p:spPr>
       </p:sp>
     </p:spTree>
   </p:cSld>
@@ -3234,8 +3215,8 @@
         </p:nvSpPr>
         <p:spPr>
           <a:xfrm>
-            <a:off x="548640" y="320040"/>
-            <a:ext cx="11091672" cy="548640"/>
+            <a:off x="457200" y="320040"/>
+            <a:ext cx="11247120" cy="548640"/>
           </a:xfrm>
           <a:prstGeom prst="rect">
             <a:avLst/>
@@ -3255,9 +3236,9 @@
                 <a:solidFill>
                   <a:srgbClr val="1E2761"/>
                 </a:solidFill>
-                <a:latin typeface="Cambria" pitchFamily="34" charset="0"/>
-                <a:ea typeface="Cambria" pitchFamily="34" charset="-122"/>
-                <a:cs typeface="Cambria" pitchFamily="34" charset="-120"/>
+                <a:latin typeface="Arial" pitchFamily="34" charset="0"/>
+                <a:ea typeface="Arial" pitchFamily="34"/>
+                <a:cs typeface="Arial" pitchFamily="34"/>
               </a:rPr>
               <a:t>State Transition Worksheet</a:t>
             </a:r>
@@ -3273,8 +3254,8 @@
         </p:nvSpPr>
         <p:spPr>
           <a:xfrm>
-            <a:off x="548640" y="868680"/>
-            <a:ext cx="11091672" cy="320040"/>
+            <a:off x="457200" y="868680"/>
+            <a:ext cx="11247120" cy="320040"/>
           </a:xfrm>
           <a:prstGeom prst="rect">
             <a:avLst/>
@@ -3290,17 +3271,17 @@
               <a:buNone/>
             </a:pPr>
             <a:r>
-              <a:rPr lang="en-US" sz="1400" dirty="0">
+              <a:rPr lang="en-US" sz="1300" dirty="0">
                 <a:solidFill>
-                  <a:srgbClr val="555555"/>
+                  <a:srgbClr val="5B6072"/>
                 </a:solidFill>
                 <a:latin typeface="Calibri" pitchFamily="34" charset="0"/>
-                <a:ea typeface="Calibri" pitchFamily="34" charset="-122"/>
-                <a:cs typeface="Calibri" pitchFamily="34" charset="-120"/>
+                <a:ea typeface="Calibri" pitchFamily="34"/>
+                <a:cs typeface="Calibri" pitchFamily="34"/>
               </a:rPr>
               <a:t>Columns: Current State | Trigger | Who / What | Next State | Condition / Note</a:t>
             </a:r>
-            <a:endParaRPr lang="en-US" sz="1400" dirty="0"/>
+            <a:endParaRPr lang="en-US" sz="1300" dirty="0"/>
           </a:p>
         </p:txBody>
       </p:sp>
@@ -3319,21 +3300,21 @@
           </p:nvPr>
         </p:nvGraphicFramePr>
         <p:xfrm>
-          <a:off x="365760" y="1417320"/>
-          <a:ext cx="11457432" cy="914400"/>
+          <a:off x="365760" y="1508760"/>
+          <a:ext cx="11430000" cy="914400"/>
         </p:xfrm>
         <a:graphic>
           <a:graphicData uri="http://schemas.openxmlformats.org/drawingml/2006/table">
             <a:tbl>
               <a:tblPr/>
               <a:tblGrid>
-                <a:gridCol w="2011680"/>
+                <a:gridCol w="2103120"/>
                 <a:gridCol w="2286000"/>
-                <a:gridCol w="1463040"/>
-                <a:gridCol w="2011680"/>
-                <a:gridCol w="3566160"/>
+                <a:gridCol w="1554480"/>
+                <a:gridCol w="2103120"/>
+                <a:gridCol w="3383280"/>
               </a:tblGrid>
-              <a:tr h="658368">
+              <a:tr h="0">
                 <a:tc>
                   <a:txBody>
                     <a:bodyPr/>
@@ -3343,17 +3324,17 @@
                         <a:buNone/>
                       </a:pPr>
                       <a:r>
-                        <a:rPr lang="en-US" sz="1100" b="1" dirty="0">
+                        <a:rPr lang="en-US" sz="1150" b="1" dirty="0">
                           <a:solidFill>
                             <a:srgbClr val="FFFFFF"/>
                           </a:solidFill>
                           <a:latin typeface="Calibri" pitchFamily="34" charset="0"/>
-                          <a:ea typeface="Calibri" pitchFamily="34" charset="-122"/>
-                          <a:cs typeface="Calibri" pitchFamily="34" charset="-120"/>
+                          <a:ea typeface="Calibri" pitchFamily="34"/>
+                          <a:cs typeface="Calibri" pitchFamily="34"/>
                         </a:rPr>
                         <a:t>Current State</a:t>
                       </a:r>
-                      <a:endParaRPr lang="en-US" sz="1100" dirty="0">
+                      <a:endParaRPr lang="en-US" sz="1150" dirty="0">
                         <a:latin typeface="Calibri" charset="0"/>
                         <a:ea typeface="Calibri" charset="0"/>
                         <a:cs typeface="Calibri" charset="0"/>
@@ -3363,7 +3344,7 @@
                   <a:tcPr marL="91440" marR="91440" marT="45720" marB="45720" anchor="ctr">
                     <a:lnL w="9525" cap="flat" cmpd="sng" algn="ctr">
                       <a:solidFill>
-                        <a:srgbClr val="D9D9D9"/>
+                        <a:srgbClr val="D5D9E0"/>
                       </a:solidFill>
                       <a:prstDash val="solid"/>
                       <a:round/>
@@ -3372,7 +3353,7 @@
                     </a:lnL>
                     <a:lnR w="9525" cap="flat" cmpd="sng" algn="ctr">
                       <a:solidFill>
-                        <a:srgbClr val="D9D9D9"/>
+                        <a:srgbClr val="D5D9E0"/>
                       </a:solidFill>
                       <a:prstDash val="solid"/>
                       <a:round/>
@@ -3381,7 +3362,7 @@
                     </a:lnR>
                     <a:lnT w="9525" cap="flat" cmpd="sng" algn="ctr">
                       <a:solidFill>
-                        <a:srgbClr val="D9D9D9"/>
+                        <a:srgbClr val="D5D9E0"/>
                       </a:solidFill>
                       <a:prstDash val="solid"/>
                       <a:round/>
@@ -3390,7 +3371,7 @@
                     </a:lnT>
                     <a:lnB w="9525" cap="flat" cmpd="sng" algn="ctr">
                       <a:solidFill>
-                        <a:srgbClr val="D9D9D9"/>
+                        <a:srgbClr val="D5D9E0"/>
                       </a:solidFill>
                       <a:prstDash val="solid"/>
                       <a:round/>
@@ -3411,17 +3392,17 @@
                         <a:buNone/>
                       </a:pPr>
                       <a:r>
-                        <a:rPr lang="en-US" sz="1100" b="1" dirty="0">
+                        <a:rPr lang="en-US" sz="1150" b="1" dirty="0">
                           <a:solidFill>
                             <a:srgbClr val="FFFFFF"/>
                           </a:solidFill>
                           <a:latin typeface="Calibri" pitchFamily="34" charset="0"/>
-                          <a:ea typeface="Calibri" pitchFamily="34" charset="-122"/>
-                          <a:cs typeface="Calibri" pitchFamily="34" charset="-120"/>
+                          <a:ea typeface="Calibri" pitchFamily="34"/>
+                          <a:cs typeface="Calibri" pitchFamily="34"/>
                         </a:rPr>
                         <a:t>Trigger</a:t>
                       </a:r>
-                      <a:endParaRPr lang="en-US" sz="1100" dirty="0">
+                      <a:endParaRPr lang="en-US" sz="1150" dirty="0">
                         <a:latin typeface="Calibri" charset="0"/>
                         <a:ea typeface="Calibri" charset="0"/>
                         <a:cs typeface="Calibri" charset="0"/>
@@ -3431,7 +3412,7 @@
                   <a:tcPr marL="91440" marR="91440" marT="45720" marB="45720" anchor="ctr">
                     <a:lnL w="9525" cap="flat" cmpd="sng" algn="ctr">
                       <a:solidFill>
-                        <a:srgbClr val="D9D9D9"/>
+                        <a:srgbClr val="D5D9E0"/>
                       </a:solidFill>
                       <a:prstDash val="solid"/>
                       <a:round/>
@@ -3440,7 +3421,7 @@
                     </a:lnL>
                     <a:lnR w="9525" cap="flat" cmpd="sng" algn="ctr">
                       <a:solidFill>
-                        <a:srgbClr val="D9D9D9"/>
+                        <a:srgbClr val="D5D9E0"/>
                       </a:solidFill>
                       <a:prstDash val="solid"/>
                       <a:round/>
@@ -3449,7 +3430,7 @@
                     </a:lnR>
                     <a:lnT w="9525" cap="flat" cmpd="sng" algn="ctr">
                       <a:solidFill>
-                        <a:srgbClr val="D9D9D9"/>
+                        <a:srgbClr val="D5D9E0"/>
                       </a:solidFill>
                       <a:prstDash val="solid"/>
                       <a:round/>
@@ -3458,7 +3439,7 @@
                     </a:lnT>
                     <a:lnB w="9525" cap="flat" cmpd="sng" algn="ctr">
                       <a:solidFill>
-                        <a:srgbClr val="D9D9D9"/>
+                        <a:srgbClr val="D5D9E0"/>
                       </a:solidFill>
                       <a:prstDash val="solid"/>
                       <a:round/>
@@ -3479,17 +3460,17 @@
                         <a:buNone/>
                       </a:pPr>
                       <a:r>
-                        <a:rPr lang="en-US" sz="1100" b="1" dirty="0">
+                        <a:rPr lang="en-US" sz="1150" b="1" dirty="0">
                           <a:solidFill>
                             <a:srgbClr val="FFFFFF"/>
                           </a:solidFill>
                           <a:latin typeface="Calibri" pitchFamily="34" charset="0"/>
-                          <a:ea typeface="Calibri" pitchFamily="34" charset="-122"/>
-                          <a:cs typeface="Calibri" pitchFamily="34" charset="-120"/>
+                          <a:ea typeface="Calibri" pitchFamily="34"/>
+                          <a:cs typeface="Calibri" pitchFamily="34"/>
                         </a:rPr>
                         <a:t>Who / What</a:t>
                       </a:r>
-                      <a:endParaRPr lang="en-US" sz="1100" dirty="0">
+                      <a:endParaRPr lang="en-US" sz="1150" dirty="0">
                         <a:latin typeface="Calibri" charset="0"/>
                         <a:ea typeface="Calibri" charset="0"/>
                         <a:cs typeface="Calibri" charset="0"/>
@@ -3499,7 +3480,7 @@
                   <a:tcPr marL="91440" marR="91440" marT="45720" marB="45720" anchor="ctr">
                     <a:lnL w="9525" cap="flat" cmpd="sng" algn="ctr">
                       <a:solidFill>
-                        <a:srgbClr val="D9D9D9"/>
+                        <a:srgbClr val="D5D9E0"/>
                       </a:solidFill>
                       <a:prstDash val="solid"/>
                       <a:round/>
@@ -3508,7 +3489,7 @@
                     </a:lnL>
                     <a:lnR w="9525" cap="flat" cmpd="sng" algn="ctr">
                       <a:solidFill>
-                        <a:srgbClr val="D9D9D9"/>
+                        <a:srgbClr val="D5D9E0"/>
                       </a:solidFill>
                       <a:prstDash val="solid"/>
                       <a:round/>
@@ -3517,7 +3498,7 @@
                     </a:lnR>
                     <a:lnT w="9525" cap="flat" cmpd="sng" algn="ctr">
                       <a:solidFill>
-                        <a:srgbClr val="D9D9D9"/>
+                        <a:srgbClr val="D5D9E0"/>
                       </a:solidFill>
                       <a:prstDash val="solid"/>
                       <a:round/>
@@ -3526,7 +3507,7 @@
                     </a:lnT>
                     <a:lnB w="9525" cap="flat" cmpd="sng" algn="ctr">
                       <a:solidFill>
-                        <a:srgbClr val="D9D9D9"/>
+                        <a:srgbClr val="D5D9E0"/>
                       </a:solidFill>
                       <a:prstDash val="solid"/>
                       <a:round/>
@@ -3547,17 +3528,17 @@
                         <a:buNone/>
                       </a:pPr>
                       <a:r>
-                        <a:rPr lang="en-US" sz="1100" b="1" dirty="0">
+                        <a:rPr lang="en-US" sz="1150" b="1" dirty="0">
                           <a:solidFill>
                             <a:srgbClr val="FFFFFF"/>
                           </a:solidFill>
                           <a:latin typeface="Calibri" pitchFamily="34" charset="0"/>
-                          <a:ea typeface="Calibri" pitchFamily="34" charset="-122"/>
-                          <a:cs typeface="Calibri" pitchFamily="34" charset="-120"/>
+                          <a:ea typeface="Calibri" pitchFamily="34"/>
+                          <a:cs typeface="Calibri" pitchFamily="34"/>
                         </a:rPr>
                         <a:t>Next State</a:t>
                       </a:r>
-                      <a:endParaRPr lang="en-US" sz="1100" dirty="0">
+                      <a:endParaRPr lang="en-US" sz="1150" dirty="0">
                         <a:latin typeface="Calibri" charset="0"/>
                         <a:ea typeface="Calibri" charset="0"/>
                         <a:cs typeface="Calibri" charset="0"/>
@@ -3567,7 +3548,7 @@
                   <a:tcPr marL="91440" marR="91440" marT="45720" marB="45720" anchor="ctr">
                     <a:lnL w="9525" cap="flat" cmpd="sng" algn="ctr">
                       <a:solidFill>
-                        <a:srgbClr val="D9D9D9"/>
+                        <a:srgbClr val="D5D9E0"/>
                       </a:solidFill>
                       <a:prstDash val="solid"/>
                       <a:round/>
@@ -3576,7 +3557,7 @@
                     </a:lnL>
                     <a:lnR w="9525" cap="flat" cmpd="sng" algn="ctr">
                       <a:solidFill>
-                        <a:srgbClr val="D9D9D9"/>
+                        <a:srgbClr val="D5D9E0"/>
                       </a:solidFill>
                       <a:prstDash val="solid"/>
                       <a:round/>
@@ -3585,7 +3566,7 @@
                     </a:lnR>
                     <a:lnT w="9525" cap="flat" cmpd="sng" algn="ctr">
                       <a:solidFill>
-                        <a:srgbClr val="D9D9D9"/>
+                        <a:srgbClr val="D5D9E0"/>
                       </a:solidFill>
                       <a:prstDash val="solid"/>
                       <a:round/>
@@ -3594,7 +3575,7 @@
                     </a:lnT>
                     <a:lnB w="9525" cap="flat" cmpd="sng" algn="ctr">
                       <a:solidFill>
-                        <a:srgbClr val="D9D9D9"/>
+                        <a:srgbClr val="D5D9E0"/>
                       </a:solidFill>
                       <a:prstDash val="solid"/>
                       <a:round/>
@@ -3615,17 +3596,17 @@
                         <a:buNone/>
                       </a:pPr>
                       <a:r>
-                        <a:rPr lang="en-US" sz="1100" b="1" dirty="0">
+                        <a:rPr lang="en-US" sz="1150" b="1" dirty="0">
                           <a:solidFill>
                             <a:srgbClr val="FFFFFF"/>
                           </a:solidFill>
                           <a:latin typeface="Calibri" pitchFamily="34" charset="0"/>
-                          <a:ea typeface="Calibri" pitchFamily="34" charset="-122"/>
-                          <a:cs typeface="Calibri" pitchFamily="34" charset="-120"/>
+                          <a:ea typeface="Calibri" pitchFamily="34"/>
+                          <a:cs typeface="Calibri" pitchFamily="34"/>
                         </a:rPr>
                         <a:t>Condition / Note</a:t>
                       </a:r>
-                      <a:endParaRPr lang="en-US" sz="1100" dirty="0">
+                      <a:endParaRPr lang="en-US" sz="1150" dirty="0">
                         <a:latin typeface="Calibri" charset="0"/>
                         <a:ea typeface="Calibri" charset="0"/>
                         <a:cs typeface="Calibri" charset="0"/>
@@ -3635,7 +3616,7 @@
                   <a:tcPr marL="91440" marR="91440" marT="45720" marB="45720" anchor="ctr">
                     <a:lnL w="9525" cap="flat" cmpd="sng" algn="ctr">
                       <a:solidFill>
-                        <a:srgbClr val="D9D9D9"/>
+                        <a:srgbClr val="D5D9E0"/>
                       </a:solidFill>
                       <a:prstDash val="solid"/>
                       <a:round/>
@@ -3644,7 +3625,7 @@
                     </a:lnL>
                     <a:lnR w="9525" cap="flat" cmpd="sng" algn="ctr">
                       <a:solidFill>
-                        <a:srgbClr val="D9D9D9"/>
+                        <a:srgbClr val="D5D9E0"/>
                       </a:solidFill>
                       <a:prstDash val="solid"/>
                       <a:round/>
@@ -3653,7 +3634,7 @@
                     </a:lnR>
                     <a:lnT w="9525" cap="flat" cmpd="sng" algn="ctr">
                       <a:solidFill>
-                        <a:srgbClr val="D9D9D9"/>
+                        <a:srgbClr val="D5D9E0"/>
                       </a:solidFill>
                       <a:prstDash val="solid"/>
                       <a:round/>
@@ -3662,7 +3643,7 @@
                     </a:lnT>
                     <a:lnB w="9525" cap="flat" cmpd="sng" algn="ctr">
                       <a:solidFill>
-                        <a:srgbClr val="D9D9D9"/>
+                        <a:srgbClr val="D5D9E0"/>
                       </a:solidFill>
                       <a:prstDash val="solid"/>
                       <a:round/>
@@ -3675,7 +3656,7 @@
                   </a:tcPr>
                 </a:tc>
               </a:tr>
-              <a:tr h="658368">
+              <a:tr h="0">
                 <a:tc>
                   <a:txBody>
                     <a:bodyPr/>
@@ -3685,17 +3666,17 @@
                         <a:buNone/>
                       </a:pPr>
                       <a:r>
-                        <a:rPr lang="en-US" sz="950" dirty="0">
+                        <a:rPr lang="en-US" sz="1050" dirty="0">
                           <a:solidFill>
-                            <a:srgbClr val="202020"/>
+                            <a:srgbClr val="222533"/>
                           </a:solidFill>
                           <a:latin typeface="Calibri" pitchFamily="34" charset="0"/>
-                          <a:ea typeface="Calibri" pitchFamily="34" charset="-122"/>
-                          <a:cs typeface="Calibri" pitchFamily="34" charset="-120"/>
+                          <a:ea typeface="Calibri" pitchFamily="34"/>
+                          <a:cs typeface="Calibri" pitchFamily="34"/>
                         </a:rPr>
                         <a:t>(start)</a:t>
                       </a:r>
-                      <a:endParaRPr lang="en-US" sz="950" dirty="0">
+                      <a:endParaRPr lang="en-US" sz="1050" dirty="0">
                         <a:latin typeface="Calibri" charset="0"/>
                         <a:ea typeface="Calibri" charset="0"/>
                         <a:cs typeface="Calibri" charset="0"/>
@@ -3705,7 +3686,7 @@
                   <a:tcPr marL="91440" marR="91440" marT="45720" marB="45720" anchor="ctr">
                     <a:lnL w="9525" cap="flat" cmpd="sng" algn="ctr">
                       <a:solidFill>
-                        <a:srgbClr val="D9D9D9"/>
+                        <a:srgbClr val="D5D9E0"/>
                       </a:solidFill>
                       <a:prstDash val="solid"/>
                       <a:round/>
@@ -3714,7 +3695,7 @@
                     </a:lnL>
                     <a:lnR w="9525" cap="flat" cmpd="sng" algn="ctr">
                       <a:solidFill>
-                        <a:srgbClr val="D9D9D9"/>
+                        <a:srgbClr val="D5D9E0"/>
                       </a:solidFill>
                       <a:prstDash val="solid"/>
                       <a:round/>
@@ -3723,7 +3704,7 @@
                     </a:lnR>
                     <a:lnT w="9525" cap="flat" cmpd="sng" algn="ctr">
                       <a:solidFill>
-                        <a:srgbClr val="D9D9D9"/>
+                        <a:srgbClr val="D5D9E0"/>
                       </a:solidFill>
                       <a:prstDash val="solid"/>
                       <a:round/>
@@ -3732,7 +3713,7 @@
                     </a:lnT>
                     <a:lnB w="9525" cap="flat" cmpd="sng" algn="ctr">
                       <a:solidFill>
-                        <a:srgbClr val="D9D9D9"/>
+                        <a:srgbClr val="D5D9E0"/>
                       </a:solidFill>
                       <a:prstDash val="solid"/>
                       <a:round/>
@@ -3753,17 +3734,17 @@
                         <a:buNone/>
                       </a:pPr>
                       <a:r>
-                        <a:rPr lang="en-US" sz="950" dirty="0">
+                        <a:rPr lang="en-US" sz="1050" dirty="0">
                           <a:solidFill>
-                            <a:srgbClr val="202020"/>
+                            <a:srgbClr val="222533"/>
                           </a:solidFill>
                           <a:latin typeface="Calibri" pitchFamily="34" charset="0"/>
-                          <a:ea typeface="Calibri" pitchFamily="34" charset="-122"/>
-                          <a:cs typeface="Calibri" pitchFamily="34" charset="-120"/>
+                          <a:ea typeface="Calibri" pitchFamily="34"/>
+                          <a:cs typeface="Calibri" pitchFamily="34"/>
                         </a:rPr>
                         <a:t>Customer submits return request</a:t>
                       </a:r>
-                      <a:endParaRPr lang="en-US" sz="950" dirty="0">
+                      <a:endParaRPr lang="en-US" sz="1050" dirty="0">
                         <a:latin typeface="Calibri" charset="0"/>
                         <a:ea typeface="Calibri" charset="0"/>
                         <a:cs typeface="Calibri" charset="0"/>
@@ -3773,7 +3754,7 @@
                   <a:tcPr marL="91440" marR="91440" marT="45720" marB="45720" anchor="ctr">
                     <a:lnL w="9525" cap="flat" cmpd="sng" algn="ctr">
                       <a:solidFill>
-                        <a:srgbClr val="D9D9D9"/>
+                        <a:srgbClr val="D5D9E0"/>
                       </a:solidFill>
                       <a:prstDash val="solid"/>
                       <a:round/>
@@ -3782,7 +3763,7 @@
                     </a:lnL>
                     <a:lnR w="9525" cap="flat" cmpd="sng" algn="ctr">
                       <a:solidFill>
-                        <a:srgbClr val="D9D9D9"/>
+                        <a:srgbClr val="D5D9E0"/>
                       </a:solidFill>
                       <a:prstDash val="solid"/>
                       <a:round/>
@@ -3791,7 +3772,7 @@
                     </a:lnR>
                     <a:lnT w="9525" cap="flat" cmpd="sng" algn="ctr">
                       <a:solidFill>
-                        <a:srgbClr val="D9D9D9"/>
+                        <a:srgbClr val="D5D9E0"/>
                       </a:solidFill>
                       <a:prstDash val="solid"/>
                       <a:round/>
@@ -3800,7 +3781,7 @@
                     </a:lnT>
                     <a:lnB w="9525" cap="flat" cmpd="sng" algn="ctr">
                       <a:solidFill>
-                        <a:srgbClr val="D9D9D9"/>
+                        <a:srgbClr val="D5D9E0"/>
                       </a:solidFill>
                       <a:prstDash val="solid"/>
                       <a:round/>
@@ -3821,17 +3802,17 @@
                         <a:buNone/>
                       </a:pPr>
                       <a:r>
-                        <a:rPr lang="en-US" sz="950" dirty="0">
+                        <a:rPr lang="en-US" sz="1050" dirty="0">
                           <a:solidFill>
-                            <a:srgbClr val="202020"/>
+                            <a:srgbClr val="222533"/>
                           </a:solidFill>
                           <a:latin typeface="Calibri" pitchFamily="34" charset="0"/>
-                          <a:ea typeface="Calibri" pitchFamily="34" charset="-122"/>
-                          <a:cs typeface="Calibri" pitchFamily="34" charset="-120"/>
+                          <a:ea typeface="Calibri" pitchFamily="34"/>
+                          <a:cs typeface="Calibri" pitchFamily="34"/>
                         </a:rPr>
                         <a:t>Customer</a:t>
                       </a:r>
-                      <a:endParaRPr lang="en-US" sz="950" dirty="0">
+                      <a:endParaRPr lang="en-US" sz="1050" dirty="0">
                         <a:latin typeface="Calibri" charset="0"/>
                         <a:ea typeface="Calibri" charset="0"/>
                         <a:cs typeface="Calibri" charset="0"/>
@@ -3841,7 +3822,7 @@
                   <a:tcPr marL="91440" marR="91440" marT="45720" marB="45720" anchor="ctr">
                     <a:lnL w="9525" cap="flat" cmpd="sng" algn="ctr">
                       <a:solidFill>
-                        <a:srgbClr val="D9D9D9"/>
+                        <a:srgbClr val="D5D9E0"/>
                       </a:solidFill>
                       <a:prstDash val="solid"/>
                       <a:round/>
@@ -3850,7 +3831,7 @@
                     </a:lnL>
                     <a:lnR w="9525" cap="flat" cmpd="sng" algn="ctr">
                       <a:solidFill>
-                        <a:srgbClr val="D9D9D9"/>
+                        <a:srgbClr val="D5D9E0"/>
                       </a:solidFill>
                       <a:prstDash val="solid"/>
                       <a:round/>
@@ -3859,7 +3840,7 @@
                     </a:lnR>
                     <a:lnT w="9525" cap="flat" cmpd="sng" algn="ctr">
                       <a:solidFill>
-                        <a:srgbClr val="D9D9D9"/>
+                        <a:srgbClr val="D5D9E0"/>
                       </a:solidFill>
                       <a:prstDash val="solid"/>
                       <a:round/>
@@ -3868,7 +3849,7 @@
                     </a:lnT>
                     <a:lnB w="9525" cap="flat" cmpd="sng" algn="ctr">
                       <a:solidFill>
-                        <a:srgbClr val="D9D9D9"/>
+                        <a:srgbClr val="D5D9E0"/>
                       </a:solidFill>
                       <a:prstDash val="solid"/>
                       <a:round/>
@@ -3889,27 +3870,27 @@
                         <a:buNone/>
                       </a:pPr>
                       <a:r>
-                        <a:rPr lang="en-US" sz="950" dirty="0">
+                        <a:rPr lang="en-US" sz="1050" dirty="0">
                           <a:solidFill>
-                            <a:srgbClr val="202020"/>
+                            <a:srgbClr val="222533"/>
                           </a:solidFill>
-                          <a:latin typeface="Calibri" pitchFamily="34" charset="0"/>
-                          <a:ea typeface="Calibri" pitchFamily="34" charset="-122"/>
-                          <a:cs typeface="Calibri" pitchFamily="34" charset="-120"/>
+                          <a:latin typeface="Courier New" pitchFamily="34" charset="0"/>
+                          <a:ea typeface="Courier New" pitchFamily="34"/>
+                          <a:cs typeface="Courier New" pitchFamily="34"/>
                         </a:rPr>
                         <a:t>Submitted</a:t>
                       </a:r>
-                      <a:endParaRPr lang="en-US" sz="950" dirty="0">
-                        <a:latin typeface="Calibri" charset="0"/>
-                        <a:ea typeface="Calibri" charset="0"/>
-                        <a:cs typeface="Calibri" charset="0"/>
+                      <a:endParaRPr lang="en-US" sz="1050" dirty="0">
+                        <a:latin typeface="Courier New" charset="0"/>
+                        <a:ea typeface="Courier New" charset="0"/>
+                        <a:cs typeface="Courier New" charset="0"/>
                       </a:endParaRPr>
                     </a:p>
                   </a:txBody>
                   <a:tcPr marL="91440" marR="91440" marT="45720" marB="45720" anchor="ctr">
                     <a:lnL w="9525" cap="flat" cmpd="sng" algn="ctr">
                       <a:solidFill>
-                        <a:srgbClr val="D9D9D9"/>
+                        <a:srgbClr val="D5D9E0"/>
                       </a:solidFill>
                       <a:prstDash val="solid"/>
                       <a:round/>
@@ -3918,7 +3899,7 @@
                     </a:lnL>
                     <a:lnR w="9525" cap="flat" cmpd="sng" algn="ctr">
                       <a:solidFill>
-                        <a:srgbClr val="D9D9D9"/>
+                        <a:srgbClr val="D5D9E0"/>
                       </a:solidFill>
                       <a:prstDash val="solid"/>
                       <a:round/>
@@ -3927,7 +3908,7 @@
                     </a:lnR>
                     <a:lnT w="9525" cap="flat" cmpd="sng" algn="ctr">
                       <a:solidFill>
-                        <a:srgbClr val="D9D9D9"/>
+                        <a:srgbClr val="D5D9E0"/>
                       </a:solidFill>
                       <a:prstDash val="solid"/>
                       <a:round/>
@@ -3936,7 +3917,7 @@
                     </a:lnT>
                     <a:lnB w="9525" cap="flat" cmpd="sng" algn="ctr">
                       <a:solidFill>
-                        <a:srgbClr val="D9D9D9"/>
+                        <a:srgbClr val="D5D9E0"/>
                       </a:solidFill>
                       <a:prstDash val="solid"/>
                       <a:round/>
@@ -3957,17 +3938,17 @@
                         <a:buNone/>
                       </a:pPr>
                       <a:r>
-                        <a:rPr lang="en-US" sz="950" dirty="0">
+                        <a:rPr lang="en-US" sz="1050" dirty="0">
                           <a:solidFill>
-                            <a:srgbClr val="202020"/>
+                            <a:srgbClr val="222533"/>
                           </a:solidFill>
                           <a:latin typeface="Calibri" pitchFamily="34" charset="0"/>
-                          <a:ea typeface="Calibri" pitchFamily="34" charset="-122"/>
-                          <a:cs typeface="Calibri" pitchFamily="34" charset="-120"/>
+                          <a:ea typeface="Calibri" pitchFamily="34"/>
+                          <a:cs typeface="Calibri" pitchFamily="34"/>
                         </a:rPr>
                         <a:t>Required fields present</a:t>
                       </a:r>
-                      <a:endParaRPr lang="en-US" sz="950" dirty="0">
+                      <a:endParaRPr lang="en-US" sz="1050" dirty="0">
                         <a:latin typeface="Calibri" charset="0"/>
                         <a:ea typeface="Calibri" charset="0"/>
                         <a:cs typeface="Calibri" charset="0"/>
@@ -3977,7 +3958,7 @@
                   <a:tcPr marL="91440" marR="91440" marT="45720" marB="45720" anchor="ctr">
                     <a:lnL w="9525" cap="flat" cmpd="sng" algn="ctr">
                       <a:solidFill>
-                        <a:srgbClr val="D9D9D9"/>
+                        <a:srgbClr val="D5D9E0"/>
                       </a:solidFill>
                       <a:prstDash val="solid"/>
                       <a:round/>
@@ -3986,7 +3967,7 @@
                     </a:lnL>
                     <a:lnR w="9525" cap="flat" cmpd="sng" algn="ctr">
                       <a:solidFill>
-                        <a:srgbClr val="D9D9D9"/>
+                        <a:srgbClr val="D5D9E0"/>
                       </a:solidFill>
                       <a:prstDash val="solid"/>
                       <a:round/>
@@ -3995,7 +3976,7 @@
                     </a:lnR>
                     <a:lnT w="9525" cap="flat" cmpd="sng" algn="ctr">
                       <a:solidFill>
-                        <a:srgbClr val="D9D9D9"/>
+                        <a:srgbClr val="D5D9E0"/>
                       </a:solidFill>
                       <a:prstDash val="solid"/>
                       <a:round/>
@@ -4004,7 +3985,7 @@
                     </a:lnT>
                     <a:lnB w="9525" cap="flat" cmpd="sng" algn="ctr">
                       <a:solidFill>
-                        <a:srgbClr val="D9D9D9"/>
+                        <a:srgbClr val="D5D9E0"/>
                       </a:solidFill>
                       <a:prstDash val="solid"/>
                       <a:round/>
@@ -4017,7 +3998,7 @@
                   </a:tcPr>
                 </a:tc>
               </a:tr>
-              <a:tr h="658368">
+              <a:tr h="0">
                 <a:tc>
                   <a:txBody>
                     <a:bodyPr/>
@@ -4027,17 +4008,17 @@
                         <a:buNone/>
                       </a:pPr>
                       <a:r>
-                        <a:rPr lang="en-US" sz="950" dirty="0">
+                        <a:rPr lang="en-US" sz="1050" dirty="0">
                           <a:solidFill>
-                            <a:srgbClr val="202020"/>
+                            <a:srgbClr val="222533"/>
                           </a:solidFill>
                           <a:latin typeface="Calibri" pitchFamily="34" charset="0"/>
-                          <a:ea typeface="Calibri" pitchFamily="34" charset="-122"/>
-                          <a:cs typeface="Calibri" pitchFamily="34" charset="-120"/>
+                          <a:ea typeface="Calibri" pitchFamily="34"/>
+                          <a:cs typeface="Calibri" pitchFamily="34"/>
                         </a:rPr>
                         <a:t>Submitted</a:t>
                       </a:r>
-                      <a:endParaRPr lang="en-US" sz="950" dirty="0">
+                      <a:endParaRPr lang="en-US" sz="1050" dirty="0">
                         <a:latin typeface="Calibri" charset="0"/>
                         <a:ea typeface="Calibri" charset="0"/>
                         <a:cs typeface="Calibri" charset="0"/>
@@ -4047,7 +4028,7 @@
                   <a:tcPr marL="91440" marR="91440" marT="45720" marB="45720" anchor="ctr">
                     <a:lnL w="9525" cap="flat" cmpd="sng" algn="ctr">
                       <a:solidFill>
-                        <a:srgbClr val="D9D9D9"/>
+                        <a:srgbClr val="D5D9E0"/>
                       </a:solidFill>
                       <a:prstDash val="solid"/>
                       <a:round/>
@@ -4056,7 +4037,7 @@
                     </a:lnL>
                     <a:lnR w="9525" cap="flat" cmpd="sng" algn="ctr">
                       <a:solidFill>
-                        <a:srgbClr val="D9D9D9"/>
+                        <a:srgbClr val="D5D9E0"/>
                       </a:solidFill>
                       <a:prstDash val="solid"/>
                       <a:round/>
@@ -4065,7 +4046,7 @@
                     </a:lnR>
                     <a:lnT w="9525" cap="flat" cmpd="sng" algn="ctr">
                       <a:solidFill>
-                        <a:srgbClr val="D9D9D9"/>
+                        <a:srgbClr val="D5D9E0"/>
                       </a:solidFill>
                       <a:prstDash val="solid"/>
                       <a:round/>
@@ -4074,7 +4055,7 @@
                     </a:lnT>
                     <a:lnB w="9525" cap="flat" cmpd="sng" algn="ctr">
                       <a:solidFill>
-                        <a:srgbClr val="D9D9D9"/>
+                        <a:srgbClr val="D5D9E0"/>
                       </a:solidFill>
                       <a:prstDash val="solid"/>
                       <a:round/>
@@ -4082,7 +4063,7 @@
                       <a:tailEnd type="none" w="med" len="med"/>
                     </a:lnB>
                     <a:solidFill>
-                      <a:srgbClr val="F4F6FC"/>
+                      <a:srgbClr val="F7F8FA"/>
                     </a:solidFill>
                   </a:tcPr>
                 </a:tc>
@@ -4095,17 +4076,17 @@
                         <a:buNone/>
                       </a:pPr>
                       <a:r>
-                        <a:rPr lang="en-US" sz="950" dirty="0">
+                        <a:rPr lang="en-US" sz="1050" dirty="0">
                           <a:solidFill>
-                            <a:srgbClr val="202020"/>
+                            <a:srgbClr val="222533"/>
                           </a:solidFill>
                           <a:latin typeface="Calibri" pitchFamily="34" charset="0"/>
-                          <a:ea typeface="Calibri" pitchFamily="34" charset="-122"/>
-                          <a:cs typeface="Calibri" pitchFamily="34" charset="-120"/>
+                          <a:ea typeface="Calibri" pitchFamily="34"/>
+                          <a:cs typeface="Calibri" pitchFamily="34"/>
                         </a:rPr>
                         <a:t>Automatic validation runs</a:t>
                       </a:r>
-                      <a:endParaRPr lang="en-US" sz="950" dirty="0">
+                      <a:endParaRPr lang="en-US" sz="1050" dirty="0">
                         <a:latin typeface="Calibri" charset="0"/>
                         <a:ea typeface="Calibri" charset="0"/>
                         <a:cs typeface="Calibri" charset="0"/>
@@ -4115,7 +4096,7 @@
                   <a:tcPr marL="91440" marR="91440" marT="45720" marB="45720" anchor="ctr">
                     <a:lnL w="9525" cap="flat" cmpd="sng" algn="ctr">
                       <a:solidFill>
-                        <a:srgbClr val="D9D9D9"/>
+                        <a:srgbClr val="D5D9E0"/>
                       </a:solidFill>
                       <a:prstDash val="solid"/>
                       <a:round/>
@@ -4124,7 +4105,7 @@
                     </a:lnL>
                     <a:lnR w="9525" cap="flat" cmpd="sng" algn="ctr">
                       <a:solidFill>
-                        <a:srgbClr val="D9D9D9"/>
+                        <a:srgbClr val="D5D9E0"/>
                       </a:solidFill>
                       <a:prstDash val="solid"/>
                       <a:round/>
@@ -4133,7 +4114,7 @@
                     </a:lnR>
                     <a:lnT w="9525" cap="flat" cmpd="sng" algn="ctr">
                       <a:solidFill>
-                        <a:srgbClr val="D9D9D9"/>
+                        <a:srgbClr val="D5D9E0"/>
                       </a:solidFill>
                       <a:prstDash val="solid"/>
                       <a:round/>
@@ -4142,7 +4123,7 @@
                     </a:lnT>
                     <a:lnB w="9525" cap="flat" cmpd="sng" algn="ctr">
                       <a:solidFill>
-                        <a:srgbClr val="D9D9D9"/>
+                        <a:srgbClr val="D5D9E0"/>
                       </a:solidFill>
                       <a:prstDash val="solid"/>
                       <a:round/>
@@ -4150,7 +4131,7 @@
                       <a:tailEnd type="none" w="med" len="med"/>
                     </a:lnB>
                     <a:solidFill>
-                      <a:srgbClr val="F4F6FC"/>
+                      <a:srgbClr val="F7F8FA"/>
                     </a:solidFill>
                   </a:tcPr>
                 </a:tc>
@@ -4163,17 +4144,17 @@
                         <a:buNone/>
                       </a:pPr>
                       <a:r>
-                        <a:rPr lang="en-US" sz="950" dirty="0">
+                        <a:rPr lang="en-US" sz="1050" dirty="0">
                           <a:solidFill>
-                            <a:srgbClr val="202020"/>
+                            <a:srgbClr val="222533"/>
                           </a:solidFill>
                           <a:latin typeface="Calibri" pitchFamily="34" charset="0"/>
-                          <a:ea typeface="Calibri" pitchFamily="34" charset="-122"/>
-                          <a:cs typeface="Calibri" pitchFamily="34" charset="-120"/>
+                          <a:ea typeface="Calibri" pitchFamily="34"/>
+                          <a:cs typeface="Calibri" pitchFamily="34"/>
                         </a:rPr>
                         <a:t>System</a:t>
                       </a:r>
-                      <a:endParaRPr lang="en-US" sz="950" dirty="0">
+                      <a:endParaRPr lang="en-US" sz="1050" dirty="0">
                         <a:latin typeface="Calibri" charset="0"/>
                         <a:ea typeface="Calibri" charset="0"/>
                         <a:cs typeface="Calibri" charset="0"/>
@@ -4183,7 +4164,7 @@
                   <a:tcPr marL="91440" marR="91440" marT="45720" marB="45720" anchor="ctr">
                     <a:lnL w="9525" cap="flat" cmpd="sng" algn="ctr">
                       <a:solidFill>
-                        <a:srgbClr val="D9D9D9"/>
+                        <a:srgbClr val="D5D9E0"/>
                       </a:solidFill>
                       <a:prstDash val="solid"/>
                       <a:round/>
@@ -4192,7 +4173,7 @@
                     </a:lnL>
                     <a:lnR w="9525" cap="flat" cmpd="sng" algn="ctr">
                       <a:solidFill>
-                        <a:srgbClr val="D9D9D9"/>
+                        <a:srgbClr val="D5D9E0"/>
                       </a:solidFill>
                       <a:prstDash val="solid"/>
                       <a:round/>
@@ -4201,7 +4182,7 @@
                     </a:lnR>
                     <a:lnT w="9525" cap="flat" cmpd="sng" algn="ctr">
                       <a:solidFill>
-                        <a:srgbClr val="D9D9D9"/>
+                        <a:srgbClr val="D5D9E0"/>
                       </a:solidFill>
                       <a:prstDash val="solid"/>
                       <a:round/>
@@ -4210,7 +4191,7 @@
                     </a:lnT>
                     <a:lnB w="9525" cap="flat" cmpd="sng" algn="ctr">
                       <a:solidFill>
-                        <a:srgbClr val="D9D9D9"/>
+                        <a:srgbClr val="D5D9E0"/>
                       </a:solidFill>
                       <a:prstDash val="solid"/>
                       <a:round/>
@@ -4218,7 +4199,7 @@
                       <a:tailEnd type="none" w="med" len="med"/>
                     </a:lnB>
                     <a:solidFill>
-                      <a:srgbClr val="F4F6FC"/>
+                      <a:srgbClr val="F7F8FA"/>
                     </a:solidFill>
                   </a:tcPr>
                 </a:tc>
@@ -4231,27 +4212,27 @@
                         <a:buNone/>
                       </a:pPr>
                       <a:r>
-                        <a:rPr lang="en-US" sz="950" dirty="0">
+                        <a:rPr lang="en-US" sz="1050" dirty="0">
                           <a:solidFill>
-                            <a:srgbClr val="202020"/>
+                            <a:srgbClr val="222533"/>
                           </a:solidFill>
-                          <a:latin typeface="Calibri" pitchFamily="34" charset="0"/>
-                          <a:ea typeface="Calibri" pitchFamily="34" charset="-122"/>
-                          <a:cs typeface="Calibri" pitchFamily="34" charset="-120"/>
+                          <a:latin typeface="Courier New" pitchFamily="34" charset="0"/>
+                          <a:ea typeface="Courier New" pitchFamily="34"/>
+                          <a:cs typeface="Courier New" pitchFamily="34"/>
                         </a:rPr>
                         <a:t>Rejected</a:t>
                       </a:r>
-                      <a:endParaRPr lang="en-US" sz="950" dirty="0">
-                        <a:latin typeface="Calibri" charset="0"/>
-                        <a:ea typeface="Calibri" charset="0"/>
-                        <a:cs typeface="Calibri" charset="0"/>
+                      <a:endParaRPr lang="en-US" sz="1050" dirty="0">
+                        <a:latin typeface="Courier New" charset="0"/>
+                        <a:ea typeface="Courier New" charset="0"/>
+                        <a:cs typeface="Courier New" charset="0"/>
                       </a:endParaRPr>
                     </a:p>
                   </a:txBody>
                   <a:tcPr marL="91440" marR="91440" marT="45720" marB="45720" anchor="ctr">
                     <a:lnL w="9525" cap="flat" cmpd="sng" algn="ctr">
                       <a:solidFill>
-                        <a:srgbClr val="D9D9D9"/>
+                        <a:srgbClr val="D5D9E0"/>
                       </a:solidFill>
                       <a:prstDash val="solid"/>
                       <a:round/>
@@ -4260,7 +4241,7 @@
                     </a:lnL>
                     <a:lnR w="9525" cap="flat" cmpd="sng" algn="ctr">
                       <a:solidFill>
-                        <a:srgbClr val="D9D9D9"/>
+                        <a:srgbClr val="D5D9E0"/>
                       </a:solidFill>
                       <a:prstDash val="solid"/>
                       <a:round/>
@@ -4269,7 +4250,7 @@
                     </a:lnR>
                     <a:lnT w="9525" cap="flat" cmpd="sng" algn="ctr">
                       <a:solidFill>
-                        <a:srgbClr val="D9D9D9"/>
+                        <a:srgbClr val="D5D9E0"/>
                       </a:solidFill>
                       <a:prstDash val="solid"/>
                       <a:round/>
@@ -4278,7 +4259,7 @@
                     </a:lnT>
                     <a:lnB w="9525" cap="flat" cmpd="sng" algn="ctr">
                       <a:solidFill>
-                        <a:srgbClr val="D9D9D9"/>
+                        <a:srgbClr val="D5D9E0"/>
                       </a:solidFill>
                       <a:prstDash val="solid"/>
                       <a:round/>
@@ -4286,7 +4267,7 @@
                       <a:tailEnd type="none" w="med" len="med"/>
                     </a:lnB>
                     <a:solidFill>
-                      <a:srgbClr val="F4F6FC"/>
+                      <a:srgbClr val="F7F8FA"/>
                     </a:solidFill>
                   </a:tcPr>
                 </a:tc>
@@ -4299,17 +4280,17 @@
                         <a:buNone/>
                       </a:pPr>
                       <a:r>
-                        <a:rPr lang="en-US" sz="950" dirty="0">
+                        <a:rPr lang="en-US" sz="1050" dirty="0">
                           <a:solidFill>
-                            <a:srgbClr val="202020"/>
+                            <a:srgbClr val="222533"/>
                           </a:solidFill>
                           <a:latin typeface="Calibri" pitchFamily="34" charset="0"/>
-                          <a:ea typeface="Calibri" pitchFamily="34" charset="-122"/>
-                          <a:cs typeface="Calibri" pitchFamily="34" charset="-120"/>
+                          <a:ea typeface="Calibri" pitchFamily="34"/>
+                          <a:cs typeface="Calibri" pitchFamily="34"/>
                         </a:rPr>
                         <a:t>Order &gt;30 days old, final-sale/clearance, or qty exceeds purchase (BR-1, BR-2, BR-3)</a:t>
                       </a:r>
-                      <a:endParaRPr lang="en-US" sz="950" dirty="0">
+                      <a:endParaRPr lang="en-US" sz="1050" dirty="0">
                         <a:latin typeface="Calibri" charset="0"/>
                         <a:ea typeface="Calibri" charset="0"/>
                         <a:cs typeface="Calibri" charset="0"/>
@@ -4319,7 +4300,7 @@
                   <a:tcPr marL="91440" marR="91440" marT="45720" marB="45720" anchor="ctr">
                     <a:lnL w="9525" cap="flat" cmpd="sng" algn="ctr">
                       <a:solidFill>
-                        <a:srgbClr val="D9D9D9"/>
+                        <a:srgbClr val="D5D9E0"/>
                       </a:solidFill>
                       <a:prstDash val="solid"/>
                       <a:round/>
@@ -4328,7 +4309,7 @@
                     </a:lnL>
                     <a:lnR w="9525" cap="flat" cmpd="sng" algn="ctr">
                       <a:solidFill>
-                        <a:srgbClr val="D9D9D9"/>
+                        <a:srgbClr val="D5D9E0"/>
                       </a:solidFill>
                       <a:prstDash val="solid"/>
                       <a:round/>
@@ -4337,7 +4318,7 @@
                     </a:lnR>
                     <a:lnT w="9525" cap="flat" cmpd="sng" algn="ctr">
                       <a:solidFill>
-                        <a:srgbClr val="D9D9D9"/>
+                        <a:srgbClr val="D5D9E0"/>
                       </a:solidFill>
                       <a:prstDash val="solid"/>
                       <a:round/>
@@ -4346,7 +4327,7 @@
                     </a:lnT>
                     <a:lnB w="9525" cap="flat" cmpd="sng" algn="ctr">
                       <a:solidFill>
-                        <a:srgbClr val="D9D9D9"/>
+                        <a:srgbClr val="D5D9E0"/>
                       </a:solidFill>
                       <a:prstDash val="solid"/>
                       <a:round/>
@@ -4354,12 +4335,12 @@
                       <a:tailEnd type="none" w="med" len="med"/>
                     </a:lnB>
                     <a:solidFill>
-                      <a:srgbClr val="F4F6FC"/>
+                      <a:srgbClr val="F7F8FA"/>
                     </a:solidFill>
                   </a:tcPr>
                 </a:tc>
               </a:tr>
-              <a:tr h="658368">
+              <a:tr h="0">
                 <a:tc>
                   <a:txBody>
                     <a:bodyPr/>
@@ -4369,17 +4350,17 @@
                         <a:buNone/>
                       </a:pPr>
                       <a:r>
-                        <a:rPr lang="en-US" sz="950" dirty="0">
+                        <a:rPr lang="en-US" sz="1050" dirty="0">
                           <a:solidFill>
-                            <a:srgbClr val="202020"/>
+                            <a:srgbClr val="222533"/>
                           </a:solidFill>
                           <a:latin typeface="Calibri" pitchFamily="34" charset="0"/>
-                          <a:ea typeface="Calibri" pitchFamily="34" charset="-122"/>
-                          <a:cs typeface="Calibri" pitchFamily="34" charset="-120"/>
+                          <a:ea typeface="Calibri" pitchFamily="34"/>
+                          <a:cs typeface="Calibri" pitchFamily="34"/>
                         </a:rPr>
                         <a:t>Submitted</a:t>
                       </a:r>
-                      <a:endParaRPr lang="en-US" sz="950" dirty="0">
+                      <a:endParaRPr lang="en-US" sz="1050" dirty="0">
                         <a:latin typeface="Calibri" charset="0"/>
                         <a:ea typeface="Calibri" charset="0"/>
                         <a:cs typeface="Calibri" charset="0"/>
@@ -4389,7 +4370,7 @@
                   <a:tcPr marL="91440" marR="91440" marT="45720" marB="45720" anchor="ctr">
                     <a:lnL w="9525" cap="flat" cmpd="sng" algn="ctr">
                       <a:solidFill>
-                        <a:srgbClr val="D9D9D9"/>
+                        <a:srgbClr val="D5D9E0"/>
                       </a:solidFill>
                       <a:prstDash val="solid"/>
                       <a:round/>
@@ -4398,7 +4379,7 @@
                     </a:lnL>
                     <a:lnR w="9525" cap="flat" cmpd="sng" algn="ctr">
                       <a:solidFill>
-                        <a:srgbClr val="D9D9D9"/>
+                        <a:srgbClr val="D5D9E0"/>
                       </a:solidFill>
                       <a:prstDash val="solid"/>
                       <a:round/>
@@ -4407,7 +4388,7 @@
                     </a:lnR>
                     <a:lnT w="9525" cap="flat" cmpd="sng" algn="ctr">
                       <a:solidFill>
-                        <a:srgbClr val="D9D9D9"/>
+                        <a:srgbClr val="D5D9E0"/>
                       </a:solidFill>
                       <a:prstDash val="solid"/>
                       <a:round/>
@@ -4416,7 +4397,7 @@
                     </a:lnT>
                     <a:lnB w="9525" cap="flat" cmpd="sng" algn="ctr">
                       <a:solidFill>
-                        <a:srgbClr val="D9D9D9"/>
+                        <a:srgbClr val="D5D9E0"/>
                       </a:solidFill>
                       <a:prstDash val="solid"/>
                       <a:round/>
@@ -4437,17 +4418,17 @@
                         <a:buNone/>
                       </a:pPr>
                       <a:r>
-                        <a:rPr lang="en-US" sz="950" dirty="0">
+                        <a:rPr lang="en-US" sz="1050" dirty="0">
                           <a:solidFill>
-                            <a:srgbClr val="202020"/>
+                            <a:srgbClr val="222533"/>
                           </a:solidFill>
                           <a:latin typeface="Calibri" pitchFamily="34" charset="0"/>
-                          <a:ea typeface="Calibri" pitchFamily="34" charset="-122"/>
-                          <a:cs typeface="Calibri" pitchFamily="34" charset="-120"/>
+                          <a:ea typeface="Calibri" pitchFamily="34"/>
+                          <a:cs typeface="Calibri" pitchFamily="34"/>
                         </a:rPr>
                         <a:t>Automatic validation runs</a:t>
                       </a:r>
-                      <a:endParaRPr lang="en-US" sz="950" dirty="0">
+                      <a:endParaRPr lang="en-US" sz="1050" dirty="0">
                         <a:latin typeface="Calibri" charset="0"/>
                         <a:ea typeface="Calibri" charset="0"/>
                         <a:cs typeface="Calibri" charset="0"/>
@@ -4457,7 +4438,7 @@
                   <a:tcPr marL="91440" marR="91440" marT="45720" marB="45720" anchor="ctr">
                     <a:lnL w="9525" cap="flat" cmpd="sng" algn="ctr">
                       <a:solidFill>
-                        <a:srgbClr val="D9D9D9"/>
+                        <a:srgbClr val="D5D9E0"/>
                       </a:solidFill>
                       <a:prstDash val="solid"/>
                       <a:round/>
@@ -4466,7 +4447,7 @@
                     </a:lnL>
                     <a:lnR w="9525" cap="flat" cmpd="sng" algn="ctr">
                       <a:solidFill>
-                        <a:srgbClr val="D9D9D9"/>
+                        <a:srgbClr val="D5D9E0"/>
                       </a:solidFill>
                       <a:prstDash val="solid"/>
                       <a:round/>
@@ -4475,7 +4456,7 @@
                     </a:lnR>
                     <a:lnT w="9525" cap="flat" cmpd="sng" algn="ctr">
                       <a:solidFill>
-                        <a:srgbClr val="D9D9D9"/>
+                        <a:srgbClr val="D5D9E0"/>
                       </a:solidFill>
                       <a:prstDash val="solid"/>
                       <a:round/>
@@ -4484,7 +4465,7 @@
                     </a:lnT>
                     <a:lnB w="9525" cap="flat" cmpd="sng" algn="ctr">
                       <a:solidFill>
-                        <a:srgbClr val="D9D9D9"/>
+                        <a:srgbClr val="D5D9E0"/>
                       </a:solidFill>
                       <a:prstDash val="solid"/>
                       <a:round/>
@@ -4505,17 +4486,17 @@
                         <a:buNone/>
                       </a:pPr>
                       <a:r>
-                        <a:rPr lang="en-US" sz="950" dirty="0">
+                        <a:rPr lang="en-US" sz="1050" dirty="0">
                           <a:solidFill>
-                            <a:srgbClr val="202020"/>
+                            <a:srgbClr val="222533"/>
                           </a:solidFill>
                           <a:latin typeface="Calibri" pitchFamily="34" charset="0"/>
-                          <a:ea typeface="Calibri" pitchFamily="34" charset="-122"/>
-                          <a:cs typeface="Calibri" pitchFamily="34" charset="-120"/>
+                          <a:ea typeface="Calibri" pitchFamily="34"/>
+                          <a:cs typeface="Calibri" pitchFamily="34"/>
                         </a:rPr>
                         <a:t>System</a:t>
                       </a:r>
-                      <a:endParaRPr lang="en-US" sz="950" dirty="0">
+                      <a:endParaRPr lang="en-US" sz="1050" dirty="0">
                         <a:latin typeface="Calibri" charset="0"/>
                         <a:ea typeface="Calibri" charset="0"/>
                         <a:cs typeface="Calibri" charset="0"/>
@@ -4525,7 +4506,7 @@
                   <a:tcPr marL="91440" marR="91440" marT="45720" marB="45720" anchor="ctr">
                     <a:lnL w="9525" cap="flat" cmpd="sng" algn="ctr">
                       <a:solidFill>
-                        <a:srgbClr val="D9D9D9"/>
+                        <a:srgbClr val="D5D9E0"/>
                       </a:solidFill>
                       <a:prstDash val="solid"/>
                       <a:round/>
@@ -4534,7 +4515,7 @@
                     </a:lnL>
                     <a:lnR w="9525" cap="flat" cmpd="sng" algn="ctr">
                       <a:solidFill>
-                        <a:srgbClr val="D9D9D9"/>
+                        <a:srgbClr val="D5D9E0"/>
                       </a:solidFill>
                       <a:prstDash val="solid"/>
                       <a:round/>
@@ -4543,7 +4524,7 @@
                     </a:lnR>
                     <a:lnT w="9525" cap="flat" cmpd="sng" algn="ctr">
                       <a:solidFill>
-                        <a:srgbClr val="D9D9D9"/>
+                        <a:srgbClr val="D5D9E0"/>
                       </a:solidFill>
                       <a:prstDash val="solid"/>
                       <a:round/>
@@ -4552,7 +4533,7 @@
                     </a:lnT>
                     <a:lnB w="9525" cap="flat" cmpd="sng" algn="ctr">
                       <a:solidFill>
-                        <a:srgbClr val="D9D9D9"/>
+                        <a:srgbClr val="D5D9E0"/>
                       </a:solidFill>
                       <a:prstDash val="solid"/>
                       <a:round/>
@@ -4573,27 +4554,27 @@
                         <a:buNone/>
                       </a:pPr>
                       <a:r>
-                        <a:rPr lang="en-US" sz="950" dirty="0">
+                        <a:rPr lang="en-US" sz="1050" dirty="0">
                           <a:solidFill>
-                            <a:srgbClr val="202020"/>
+                            <a:srgbClr val="222533"/>
                           </a:solidFill>
-                          <a:latin typeface="Calibri" pitchFamily="34" charset="0"/>
-                          <a:ea typeface="Calibri" pitchFamily="34" charset="-122"/>
-                          <a:cs typeface="Calibri" pitchFamily="34" charset="-120"/>
+                          <a:latin typeface="Courier New" pitchFamily="34" charset="0"/>
+                          <a:ea typeface="Courier New" pitchFamily="34"/>
+                          <a:cs typeface="Courier New" pitchFamily="34"/>
                         </a:rPr>
                         <a:t>Pending Supervisor Review</a:t>
                       </a:r>
-                      <a:endParaRPr lang="en-US" sz="950" dirty="0">
-                        <a:latin typeface="Calibri" charset="0"/>
-                        <a:ea typeface="Calibri" charset="0"/>
-                        <a:cs typeface="Calibri" charset="0"/>
+                      <a:endParaRPr lang="en-US" sz="1050" dirty="0">
+                        <a:latin typeface="Courier New" charset="0"/>
+                        <a:ea typeface="Courier New" charset="0"/>
+                        <a:cs typeface="Courier New" charset="0"/>
                       </a:endParaRPr>
                     </a:p>
                   </a:txBody>
                   <a:tcPr marL="91440" marR="91440" marT="45720" marB="45720" anchor="ctr">
                     <a:lnL w="9525" cap="flat" cmpd="sng" algn="ctr">
                       <a:solidFill>
-                        <a:srgbClr val="D9D9D9"/>
+                        <a:srgbClr val="D5D9E0"/>
                       </a:solidFill>
                       <a:prstDash val="solid"/>
                       <a:round/>
@@ -4602,7 +4583,7 @@
                     </a:lnL>
                     <a:lnR w="9525" cap="flat" cmpd="sng" algn="ctr">
                       <a:solidFill>
-                        <a:srgbClr val="D9D9D9"/>
+                        <a:srgbClr val="D5D9E0"/>
                       </a:solidFill>
                       <a:prstDash val="solid"/>
                       <a:round/>
@@ -4611,7 +4592,7 @@
                     </a:lnR>
                     <a:lnT w="9525" cap="flat" cmpd="sng" algn="ctr">
                       <a:solidFill>
-                        <a:srgbClr val="D9D9D9"/>
+                        <a:srgbClr val="D5D9E0"/>
                       </a:solidFill>
                       <a:prstDash val="solid"/>
                       <a:round/>
@@ -4620,7 +4601,7 @@
                     </a:lnT>
                     <a:lnB w="9525" cap="flat" cmpd="sng" algn="ctr">
                       <a:solidFill>
-                        <a:srgbClr val="D9D9D9"/>
+                        <a:srgbClr val="D5D9E0"/>
                       </a:solidFill>
                       <a:prstDash val="solid"/>
                       <a:round/>
@@ -4641,17 +4622,17 @@
                         <a:buNone/>
                       </a:pPr>
                       <a:r>
-                        <a:rPr lang="en-US" sz="950" dirty="0">
+                        <a:rPr lang="en-US" sz="1050" dirty="0">
                           <a:solidFill>
-                            <a:srgbClr val="202020"/>
+                            <a:srgbClr val="222533"/>
                           </a:solidFill>
                           <a:latin typeface="Calibri" pitchFamily="34" charset="0"/>
-                          <a:ea typeface="Calibri" pitchFamily="34" charset="-122"/>
-                          <a:cs typeface="Calibri" pitchFamily="34" charset="-120"/>
+                          <a:ea typeface="Calibri" pitchFamily="34"/>
+                          <a:cs typeface="Calibri" pitchFamily="34"/>
                         </a:rPr>
                         <a:t>Reason = Defective and item value &gt; $200 (BR-4)</a:t>
                       </a:r>
-                      <a:endParaRPr lang="en-US" sz="950" dirty="0">
+                      <a:endParaRPr lang="en-US" sz="1050" dirty="0">
                         <a:latin typeface="Calibri" charset="0"/>
                         <a:ea typeface="Calibri" charset="0"/>
                         <a:cs typeface="Calibri" charset="0"/>
@@ -4661,7 +4642,7 @@
                   <a:tcPr marL="91440" marR="91440" marT="45720" marB="45720" anchor="ctr">
                     <a:lnL w="9525" cap="flat" cmpd="sng" algn="ctr">
                       <a:solidFill>
-                        <a:srgbClr val="D9D9D9"/>
+                        <a:srgbClr val="D5D9E0"/>
                       </a:solidFill>
                       <a:prstDash val="solid"/>
                       <a:round/>
@@ -4670,7 +4651,7 @@
                     </a:lnL>
                     <a:lnR w="9525" cap="flat" cmpd="sng" algn="ctr">
                       <a:solidFill>
-                        <a:srgbClr val="D9D9D9"/>
+                        <a:srgbClr val="D5D9E0"/>
                       </a:solidFill>
                       <a:prstDash val="solid"/>
                       <a:round/>
@@ -4679,7 +4660,7 @@
                     </a:lnR>
                     <a:lnT w="9525" cap="flat" cmpd="sng" algn="ctr">
                       <a:solidFill>
-                        <a:srgbClr val="D9D9D9"/>
+                        <a:srgbClr val="D5D9E0"/>
                       </a:solidFill>
                       <a:prstDash val="solid"/>
                       <a:round/>
@@ -4688,7 +4669,7 @@
                     </a:lnT>
                     <a:lnB w="9525" cap="flat" cmpd="sng" algn="ctr">
                       <a:solidFill>
-                        <a:srgbClr val="D9D9D9"/>
+                        <a:srgbClr val="D5D9E0"/>
                       </a:solidFill>
                       <a:prstDash val="solid"/>
                       <a:round/>
@@ -4701,7 +4682,7 @@
                   </a:tcPr>
                 </a:tc>
               </a:tr>
-              <a:tr h="658368">
+              <a:tr h="0">
                 <a:tc>
                   <a:txBody>
                     <a:bodyPr/>
@@ -4711,17 +4692,17 @@
                         <a:buNone/>
                       </a:pPr>
                       <a:r>
-                        <a:rPr lang="en-US" sz="950" dirty="0">
+                        <a:rPr lang="en-US" sz="1050" dirty="0">
                           <a:solidFill>
-                            <a:srgbClr val="202020"/>
+                            <a:srgbClr val="222533"/>
                           </a:solidFill>
                           <a:latin typeface="Calibri" pitchFamily="34" charset="0"/>
-                          <a:ea typeface="Calibri" pitchFamily="34" charset="-122"/>
-                          <a:cs typeface="Calibri" pitchFamily="34" charset="-120"/>
+                          <a:ea typeface="Calibri" pitchFamily="34"/>
+                          <a:cs typeface="Calibri" pitchFamily="34"/>
                         </a:rPr>
                         <a:t>Submitted</a:t>
                       </a:r>
-                      <a:endParaRPr lang="en-US" sz="950" dirty="0">
+                      <a:endParaRPr lang="en-US" sz="1050" dirty="0">
                         <a:latin typeface="Calibri" charset="0"/>
                         <a:ea typeface="Calibri" charset="0"/>
                         <a:cs typeface="Calibri" charset="0"/>
@@ -4731,7 +4712,7 @@
                   <a:tcPr marL="91440" marR="91440" marT="45720" marB="45720" anchor="ctr">
                     <a:lnL w="9525" cap="flat" cmpd="sng" algn="ctr">
                       <a:solidFill>
-                        <a:srgbClr val="D9D9D9"/>
+                        <a:srgbClr val="D5D9E0"/>
                       </a:solidFill>
                       <a:prstDash val="solid"/>
                       <a:round/>
@@ -4740,7 +4721,7 @@
                     </a:lnL>
                     <a:lnR w="9525" cap="flat" cmpd="sng" algn="ctr">
                       <a:solidFill>
-                        <a:srgbClr val="D9D9D9"/>
+                        <a:srgbClr val="D5D9E0"/>
                       </a:solidFill>
                       <a:prstDash val="solid"/>
                       <a:round/>
@@ -4749,7 +4730,7 @@
                     </a:lnR>
                     <a:lnT w="9525" cap="flat" cmpd="sng" algn="ctr">
                       <a:solidFill>
-                        <a:srgbClr val="D9D9D9"/>
+                        <a:srgbClr val="D5D9E0"/>
                       </a:solidFill>
                       <a:prstDash val="solid"/>
                       <a:round/>
@@ -4758,7 +4739,7 @@
                     </a:lnT>
                     <a:lnB w="9525" cap="flat" cmpd="sng" algn="ctr">
                       <a:solidFill>
-                        <a:srgbClr val="D9D9D9"/>
+                        <a:srgbClr val="D5D9E0"/>
                       </a:solidFill>
                       <a:prstDash val="solid"/>
                       <a:round/>
@@ -4766,7 +4747,7 @@
                       <a:tailEnd type="none" w="med" len="med"/>
                     </a:lnB>
                     <a:solidFill>
-                      <a:srgbClr val="F4F6FC"/>
+                      <a:srgbClr val="F7F8FA"/>
                     </a:solidFill>
                   </a:tcPr>
                 </a:tc>
@@ -4779,17 +4760,17 @@
                         <a:buNone/>
                       </a:pPr>
                       <a:r>
-                        <a:rPr lang="en-US" sz="950" dirty="0">
+                        <a:rPr lang="en-US" sz="1050" dirty="0">
                           <a:solidFill>
-                            <a:srgbClr val="202020"/>
+                            <a:srgbClr val="222533"/>
                           </a:solidFill>
                           <a:latin typeface="Calibri" pitchFamily="34" charset="0"/>
-                          <a:ea typeface="Calibri" pitchFamily="34" charset="-122"/>
-                          <a:cs typeface="Calibri" pitchFamily="34" charset="-120"/>
+                          <a:ea typeface="Calibri" pitchFamily="34"/>
+                          <a:cs typeface="Calibri" pitchFamily="34"/>
                         </a:rPr>
                         <a:t>Automatic validation runs</a:t>
                       </a:r>
-                      <a:endParaRPr lang="en-US" sz="950" dirty="0">
+                      <a:endParaRPr lang="en-US" sz="1050" dirty="0">
                         <a:latin typeface="Calibri" charset="0"/>
                         <a:ea typeface="Calibri" charset="0"/>
                         <a:cs typeface="Calibri" charset="0"/>
@@ -4799,7 +4780,7 @@
                   <a:tcPr marL="91440" marR="91440" marT="45720" marB="45720" anchor="ctr">
                     <a:lnL w="9525" cap="flat" cmpd="sng" algn="ctr">
                       <a:solidFill>
-                        <a:srgbClr val="D9D9D9"/>
+                        <a:srgbClr val="D5D9E0"/>
                       </a:solidFill>
                       <a:prstDash val="solid"/>
                       <a:round/>
@@ -4808,7 +4789,7 @@
                     </a:lnL>
                     <a:lnR w="9525" cap="flat" cmpd="sng" algn="ctr">
                       <a:solidFill>
-                        <a:srgbClr val="D9D9D9"/>
+                        <a:srgbClr val="D5D9E0"/>
                       </a:solidFill>
                       <a:prstDash val="solid"/>
                       <a:round/>
@@ -4817,7 +4798,7 @@
                     </a:lnR>
                     <a:lnT w="9525" cap="flat" cmpd="sng" algn="ctr">
                       <a:solidFill>
-                        <a:srgbClr val="D9D9D9"/>
+                        <a:srgbClr val="D5D9E0"/>
                       </a:solidFill>
                       <a:prstDash val="solid"/>
                       <a:round/>
@@ -4826,7 +4807,7 @@
                     </a:lnT>
                     <a:lnB w="9525" cap="flat" cmpd="sng" algn="ctr">
                       <a:solidFill>
-                        <a:srgbClr val="D9D9D9"/>
+                        <a:srgbClr val="D5D9E0"/>
                       </a:solidFill>
                       <a:prstDash val="solid"/>
                       <a:round/>
@@ -4834,7 +4815,7 @@
                       <a:tailEnd type="none" w="med" len="med"/>
                     </a:lnB>
                     <a:solidFill>
-                      <a:srgbClr val="F4F6FC"/>
+                      <a:srgbClr val="F7F8FA"/>
                     </a:solidFill>
                   </a:tcPr>
                 </a:tc>
@@ -4847,17 +4828,17 @@
                         <a:buNone/>
                       </a:pPr>
                       <a:r>
-                        <a:rPr lang="en-US" sz="950" dirty="0">
+                        <a:rPr lang="en-US" sz="1050" dirty="0">
                           <a:solidFill>
-                            <a:srgbClr val="202020"/>
+                            <a:srgbClr val="222533"/>
                           </a:solidFill>
                           <a:latin typeface="Calibri" pitchFamily="34" charset="0"/>
-                          <a:ea typeface="Calibri" pitchFamily="34" charset="-122"/>
-                          <a:cs typeface="Calibri" pitchFamily="34" charset="-120"/>
+                          <a:ea typeface="Calibri" pitchFamily="34"/>
+                          <a:cs typeface="Calibri" pitchFamily="34"/>
                         </a:rPr>
                         <a:t>System</a:t>
                       </a:r>
-                      <a:endParaRPr lang="en-US" sz="950" dirty="0">
+                      <a:endParaRPr lang="en-US" sz="1050" dirty="0">
                         <a:latin typeface="Calibri" charset="0"/>
                         <a:ea typeface="Calibri" charset="0"/>
                         <a:cs typeface="Calibri" charset="0"/>
@@ -4867,7 +4848,7 @@
                   <a:tcPr marL="91440" marR="91440" marT="45720" marB="45720" anchor="ctr">
                     <a:lnL w="9525" cap="flat" cmpd="sng" algn="ctr">
                       <a:solidFill>
-                        <a:srgbClr val="D9D9D9"/>
+                        <a:srgbClr val="D5D9E0"/>
                       </a:solidFill>
                       <a:prstDash val="solid"/>
                       <a:round/>
@@ -4876,7 +4857,7 @@
                     </a:lnL>
                     <a:lnR w="9525" cap="flat" cmpd="sng" algn="ctr">
                       <a:solidFill>
-                        <a:srgbClr val="D9D9D9"/>
+                        <a:srgbClr val="D5D9E0"/>
                       </a:solidFill>
                       <a:prstDash val="solid"/>
                       <a:round/>
@@ -4885,7 +4866,7 @@
                     </a:lnR>
                     <a:lnT w="9525" cap="flat" cmpd="sng" algn="ctr">
                       <a:solidFill>
-                        <a:srgbClr val="D9D9D9"/>
+                        <a:srgbClr val="D5D9E0"/>
                       </a:solidFill>
                       <a:prstDash val="solid"/>
                       <a:round/>
@@ -4894,7 +4875,7 @@
                     </a:lnT>
                     <a:lnB w="9525" cap="flat" cmpd="sng" algn="ctr">
                       <a:solidFill>
-                        <a:srgbClr val="D9D9D9"/>
+                        <a:srgbClr val="D5D9E0"/>
                       </a:solidFill>
                       <a:prstDash val="solid"/>
                       <a:round/>
@@ -4902,7 +4883,7 @@
                       <a:tailEnd type="none" w="med" len="med"/>
                     </a:lnB>
                     <a:solidFill>
-                      <a:srgbClr val="F4F6FC"/>
+                      <a:srgbClr val="F7F8FA"/>
                     </a:solidFill>
                   </a:tcPr>
                 </a:tc>
@@ -4915,27 +4896,27 @@
                         <a:buNone/>
                       </a:pPr>
                       <a:r>
-                        <a:rPr lang="en-US" sz="950" dirty="0">
+                        <a:rPr lang="en-US" sz="1050" dirty="0">
                           <a:solidFill>
-                            <a:srgbClr val="202020"/>
+                            <a:srgbClr val="222533"/>
                           </a:solidFill>
-                          <a:latin typeface="Calibri" pitchFamily="34" charset="0"/>
-                          <a:ea typeface="Calibri" pitchFamily="34" charset="-122"/>
-                          <a:cs typeface="Calibri" pitchFamily="34" charset="-120"/>
+                          <a:latin typeface="Courier New" pitchFamily="34" charset="0"/>
+                          <a:ea typeface="Courier New" pitchFamily="34"/>
+                          <a:cs typeface="Courier New" pitchFamily="34"/>
                         </a:rPr>
                         <a:t>Approved</a:t>
                       </a:r>
-                      <a:endParaRPr lang="en-US" sz="950" dirty="0">
-                        <a:latin typeface="Calibri" charset="0"/>
-                        <a:ea typeface="Calibri" charset="0"/>
-                        <a:cs typeface="Calibri" charset="0"/>
+                      <a:endParaRPr lang="en-US" sz="1050" dirty="0">
+                        <a:latin typeface="Courier New" charset="0"/>
+                        <a:ea typeface="Courier New" charset="0"/>
+                        <a:cs typeface="Courier New" charset="0"/>
                       </a:endParaRPr>
                     </a:p>
                   </a:txBody>
                   <a:tcPr marL="91440" marR="91440" marT="45720" marB="45720" anchor="ctr">
                     <a:lnL w="9525" cap="flat" cmpd="sng" algn="ctr">
                       <a:solidFill>
-                        <a:srgbClr val="D9D9D9"/>
+                        <a:srgbClr val="D5D9E0"/>
                       </a:solidFill>
                       <a:prstDash val="solid"/>
                       <a:round/>
@@ -4944,7 +4925,7 @@
                     </a:lnL>
                     <a:lnR w="9525" cap="flat" cmpd="sng" algn="ctr">
                       <a:solidFill>
-                        <a:srgbClr val="D9D9D9"/>
+                        <a:srgbClr val="D5D9E0"/>
                       </a:solidFill>
                       <a:prstDash val="solid"/>
                       <a:round/>
@@ -4953,7 +4934,7 @@
                     </a:lnR>
                     <a:lnT w="9525" cap="flat" cmpd="sng" algn="ctr">
                       <a:solidFill>
-                        <a:srgbClr val="D9D9D9"/>
+                        <a:srgbClr val="D5D9E0"/>
                       </a:solidFill>
                       <a:prstDash val="solid"/>
                       <a:round/>
@@ -4962,7 +4943,7 @@
                     </a:lnT>
                     <a:lnB w="9525" cap="flat" cmpd="sng" algn="ctr">
                       <a:solidFill>
-                        <a:srgbClr val="D9D9D9"/>
+                        <a:srgbClr val="D5D9E0"/>
                       </a:solidFill>
                       <a:prstDash val="solid"/>
                       <a:round/>
@@ -4970,7 +4951,7 @@
                       <a:tailEnd type="none" w="med" len="med"/>
                     </a:lnB>
                     <a:solidFill>
-                      <a:srgbClr val="F4F6FC"/>
+                      <a:srgbClr val="F7F8FA"/>
                     </a:solidFill>
                   </a:tcPr>
                 </a:tc>
@@ -4983,17 +4964,17 @@
                         <a:buNone/>
                       </a:pPr>
                       <a:r>
-                        <a:rPr lang="en-US" sz="950" dirty="0">
+                        <a:rPr lang="en-US" sz="1050" dirty="0">
                           <a:solidFill>
-                            <a:srgbClr val="202020"/>
+                            <a:srgbClr val="222533"/>
                           </a:solidFill>
                           <a:latin typeface="Calibri" pitchFamily="34" charset="0"/>
-                          <a:ea typeface="Calibri" pitchFamily="34" charset="-122"/>
-                          <a:cs typeface="Calibri" pitchFamily="34" charset="-120"/>
+                          <a:ea typeface="Calibri" pitchFamily="34"/>
+                          <a:cs typeface="Calibri" pitchFamily="34"/>
                         </a:rPr>
                         <a:t>Passes all checks, no supervisor review required</a:t>
                       </a:r>
-                      <a:endParaRPr lang="en-US" sz="950" dirty="0">
+                      <a:endParaRPr lang="en-US" sz="1050" dirty="0">
                         <a:latin typeface="Calibri" charset="0"/>
                         <a:ea typeface="Calibri" charset="0"/>
                         <a:cs typeface="Calibri" charset="0"/>
@@ -5003,7 +4984,7 @@
                   <a:tcPr marL="91440" marR="91440" marT="45720" marB="45720" anchor="ctr">
                     <a:lnL w="9525" cap="flat" cmpd="sng" algn="ctr">
                       <a:solidFill>
-                        <a:srgbClr val="D9D9D9"/>
+                        <a:srgbClr val="D5D9E0"/>
                       </a:solidFill>
                       <a:prstDash val="solid"/>
                       <a:round/>
@@ -5012,7 +4993,7 @@
                     </a:lnL>
                     <a:lnR w="9525" cap="flat" cmpd="sng" algn="ctr">
                       <a:solidFill>
-                        <a:srgbClr val="D9D9D9"/>
+                        <a:srgbClr val="D5D9E0"/>
                       </a:solidFill>
                       <a:prstDash val="solid"/>
                       <a:round/>
@@ -5021,7 +5002,7 @@
                     </a:lnR>
                     <a:lnT w="9525" cap="flat" cmpd="sng" algn="ctr">
                       <a:solidFill>
-                        <a:srgbClr val="D9D9D9"/>
+                        <a:srgbClr val="D5D9E0"/>
                       </a:solidFill>
                       <a:prstDash val="solid"/>
                       <a:round/>
@@ -5030,7 +5011,7 @@
                     </a:lnT>
                     <a:lnB w="9525" cap="flat" cmpd="sng" algn="ctr">
                       <a:solidFill>
-                        <a:srgbClr val="D9D9D9"/>
+                        <a:srgbClr val="D5D9E0"/>
                       </a:solidFill>
                       <a:prstDash val="solid"/>
                       <a:round/>
@@ -5038,12 +5019,12 @@
                       <a:tailEnd type="none" w="med" len="med"/>
                     </a:lnB>
                     <a:solidFill>
-                      <a:srgbClr val="F4F6FC"/>
+                      <a:srgbClr val="F7F8FA"/>
                     </a:solidFill>
                   </a:tcPr>
                 </a:tc>
               </a:tr>
-              <a:tr h="658368">
+              <a:tr h="0">
                 <a:tc>
                   <a:txBody>
                     <a:bodyPr/>
@@ -5053,17 +5034,17 @@
                         <a:buNone/>
                       </a:pPr>
                       <a:r>
-                        <a:rPr lang="en-US" sz="950" dirty="0">
+                        <a:rPr lang="en-US" sz="1050" dirty="0">
                           <a:solidFill>
-                            <a:srgbClr val="202020"/>
+                            <a:srgbClr val="222533"/>
                           </a:solidFill>
                           <a:latin typeface="Calibri" pitchFamily="34" charset="0"/>
-                          <a:ea typeface="Calibri" pitchFamily="34" charset="-122"/>
-                          <a:cs typeface="Calibri" pitchFamily="34" charset="-120"/>
+                          <a:ea typeface="Calibri" pitchFamily="34"/>
+                          <a:cs typeface="Calibri" pitchFamily="34"/>
                         </a:rPr>
                         <a:t>Pending Supervisor Review</a:t>
                       </a:r>
-                      <a:endParaRPr lang="en-US" sz="950" dirty="0">
+                      <a:endParaRPr lang="en-US" sz="1050" dirty="0">
                         <a:latin typeface="Calibri" charset="0"/>
                         <a:ea typeface="Calibri" charset="0"/>
                         <a:cs typeface="Calibri" charset="0"/>
@@ -5073,7 +5054,7 @@
                   <a:tcPr marL="91440" marR="91440" marT="45720" marB="45720" anchor="ctr">
                     <a:lnL w="9525" cap="flat" cmpd="sng" algn="ctr">
                       <a:solidFill>
-                        <a:srgbClr val="D9D9D9"/>
+                        <a:srgbClr val="D5D9E0"/>
                       </a:solidFill>
                       <a:prstDash val="solid"/>
                       <a:round/>
@@ -5082,7 +5063,7 @@
                     </a:lnL>
                     <a:lnR w="9525" cap="flat" cmpd="sng" algn="ctr">
                       <a:solidFill>
-                        <a:srgbClr val="D9D9D9"/>
+                        <a:srgbClr val="D5D9E0"/>
                       </a:solidFill>
                       <a:prstDash val="solid"/>
                       <a:round/>
@@ -5091,7 +5072,7 @@
                     </a:lnR>
                     <a:lnT w="9525" cap="flat" cmpd="sng" algn="ctr">
                       <a:solidFill>
-                        <a:srgbClr val="D9D9D9"/>
+                        <a:srgbClr val="D5D9E0"/>
                       </a:solidFill>
                       <a:prstDash val="solid"/>
                       <a:round/>
@@ -5100,7 +5081,7 @@
                     </a:lnT>
                     <a:lnB w="9525" cap="flat" cmpd="sng" algn="ctr">
                       <a:solidFill>
-                        <a:srgbClr val="D9D9D9"/>
+                        <a:srgbClr val="D5D9E0"/>
                       </a:solidFill>
                       <a:prstDash val="solid"/>
                       <a:round/>
@@ -5121,17 +5102,17 @@
                         <a:buNone/>
                       </a:pPr>
                       <a:r>
-                        <a:rPr lang="en-US" sz="950" dirty="0">
+                        <a:rPr lang="en-US" sz="1050" dirty="0">
                           <a:solidFill>
-                            <a:srgbClr val="202020"/>
+                            <a:srgbClr val="222533"/>
                           </a:solidFill>
                           <a:latin typeface="Calibri" pitchFamily="34" charset="0"/>
-                          <a:ea typeface="Calibri" pitchFamily="34" charset="-122"/>
-                          <a:cs typeface="Calibri" pitchFamily="34" charset="-120"/>
+                          <a:ea typeface="Calibri" pitchFamily="34"/>
+                          <a:cs typeface="Calibri" pitchFamily="34"/>
                         </a:rPr>
                         <a:t>Supervisor records decision</a:t>
                       </a:r>
-                      <a:endParaRPr lang="en-US" sz="950" dirty="0">
+                      <a:endParaRPr lang="en-US" sz="1050" dirty="0">
                         <a:latin typeface="Calibri" charset="0"/>
                         <a:ea typeface="Calibri" charset="0"/>
                         <a:cs typeface="Calibri" charset="0"/>
@@ -5141,7 +5122,7 @@
                   <a:tcPr marL="91440" marR="91440" marT="45720" marB="45720" anchor="ctr">
                     <a:lnL w="9525" cap="flat" cmpd="sng" algn="ctr">
                       <a:solidFill>
-                        <a:srgbClr val="D9D9D9"/>
+                        <a:srgbClr val="D5D9E0"/>
                       </a:solidFill>
                       <a:prstDash val="solid"/>
                       <a:round/>
@@ -5150,7 +5131,7 @@
                     </a:lnL>
                     <a:lnR w="9525" cap="flat" cmpd="sng" algn="ctr">
                       <a:solidFill>
-                        <a:srgbClr val="D9D9D9"/>
+                        <a:srgbClr val="D5D9E0"/>
                       </a:solidFill>
                       <a:prstDash val="solid"/>
                       <a:round/>
@@ -5159,7 +5140,7 @@
                     </a:lnR>
                     <a:lnT w="9525" cap="flat" cmpd="sng" algn="ctr">
                       <a:solidFill>
-                        <a:srgbClr val="D9D9D9"/>
+                        <a:srgbClr val="D5D9E0"/>
                       </a:solidFill>
                       <a:prstDash val="solid"/>
                       <a:round/>
@@ -5168,7 +5149,7 @@
                     </a:lnT>
                     <a:lnB w="9525" cap="flat" cmpd="sng" algn="ctr">
                       <a:solidFill>
-                        <a:srgbClr val="D9D9D9"/>
+                        <a:srgbClr val="D5D9E0"/>
                       </a:solidFill>
                       <a:prstDash val="solid"/>
                       <a:round/>
@@ -5189,17 +5170,17 @@
                         <a:buNone/>
                       </a:pPr>
                       <a:r>
-                        <a:rPr lang="en-US" sz="950" dirty="0">
+                        <a:rPr lang="en-US" sz="1050" dirty="0">
                           <a:solidFill>
-                            <a:srgbClr val="202020"/>
+                            <a:srgbClr val="222533"/>
                           </a:solidFill>
                           <a:latin typeface="Calibri" pitchFamily="34" charset="0"/>
-                          <a:ea typeface="Calibri" pitchFamily="34" charset="-122"/>
-                          <a:cs typeface="Calibri" pitchFamily="34" charset="-120"/>
+                          <a:ea typeface="Calibri" pitchFamily="34"/>
+                          <a:cs typeface="Calibri" pitchFamily="34"/>
                         </a:rPr>
                         <a:t>Supervisor</a:t>
                       </a:r>
-                      <a:endParaRPr lang="en-US" sz="950" dirty="0">
+                      <a:endParaRPr lang="en-US" sz="1050" dirty="0">
                         <a:latin typeface="Calibri" charset="0"/>
                         <a:ea typeface="Calibri" charset="0"/>
                         <a:cs typeface="Calibri" charset="0"/>
@@ -5209,7 +5190,7 @@
                   <a:tcPr marL="91440" marR="91440" marT="45720" marB="45720" anchor="ctr">
                     <a:lnL w="9525" cap="flat" cmpd="sng" algn="ctr">
                       <a:solidFill>
-                        <a:srgbClr val="D9D9D9"/>
+                        <a:srgbClr val="D5D9E0"/>
                       </a:solidFill>
                       <a:prstDash val="solid"/>
                       <a:round/>
@@ -5218,7 +5199,7 @@
                     </a:lnL>
                     <a:lnR w="9525" cap="flat" cmpd="sng" algn="ctr">
                       <a:solidFill>
-                        <a:srgbClr val="D9D9D9"/>
+                        <a:srgbClr val="D5D9E0"/>
                       </a:solidFill>
                       <a:prstDash val="solid"/>
                       <a:round/>
@@ -5227,7 +5208,7 @@
                     </a:lnR>
                     <a:lnT w="9525" cap="flat" cmpd="sng" algn="ctr">
                       <a:solidFill>
-                        <a:srgbClr val="D9D9D9"/>
+                        <a:srgbClr val="D5D9E0"/>
                       </a:solidFill>
                       <a:prstDash val="solid"/>
                       <a:round/>
@@ -5236,7 +5217,7 @@
                     </a:lnT>
                     <a:lnB w="9525" cap="flat" cmpd="sng" algn="ctr">
                       <a:solidFill>
-                        <a:srgbClr val="D9D9D9"/>
+                        <a:srgbClr val="D5D9E0"/>
                       </a:solidFill>
                       <a:prstDash val="solid"/>
                       <a:round/>
@@ -5257,27 +5238,27 @@
                         <a:buNone/>
                       </a:pPr>
                       <a:r>
-                        <a:rPr lang="en-US" sz="950" dirty="0">
+                        <a:rPr lang="en-US" sz="1050" dirty="0">
                           <a:solidFill>
-                            <a:srgbClr val="202020"/>
+                            <a:srgbClr val="222533"/>
                           </a:solidFill>
-                          <a:latin typeface="Calibri" pitchFamily="34" charset="0"/>
-                          <a:ea typeface="Calibri" pitchFamily="34" charset="-122"/>
-                          <a:cs typeface="Calibri" pitchFamily="34" charset="-120"/>
+                          <a:latin typeface="Courier New" pitchFamily="34" charset="0"/>
+                          <a:ea typeface="Courier New" pitchFamily="34"/>
+                          <a:cs typeface="Courier New" pitchFamily="34"/>
                         </a:rPr>
                         <a:t>Approved</a:t>
                       </a:r>
-                      <a:endParaRPr lang="en-US" sz="950" dirty="0">
-                        <a:latin typeface="Calibri" charset="0"/>
-                        <a:ea typeface="Calibri" charset="0"/>
-                        <a:cs typeface="Calibri" charset="0"/>
+                      <a:endParaRPr lang="en-US" sz="1050" dirty="0">
+                        <a:latin typeface="Courier New" charset="0"/>
+                        <a:ea typeface="Courier New" charset="0"/>
+                        <a:cs typeface="Courier New" charset="0"/>
                       </a:endParaRPr>
                     </a:p>
                   </a:txBody>
                   <a:tcPr marL="91440" marR="91440" marT="45720" marB="45720" anchor="ctr">
                     <a:lnL w="9525" cap="flat" cmpd="sng" algn="ctr">
                       <a:solidFill>
-                        <a:srgbClr val="D9D9D9"/>
+                        <a:srgbClr val="D5D9E0"/>
                       </a:solidFill>
                       <a:prstDash val="solid"/>
                       <a:round/>
@@ -5286,7 +5267,7 @@
                     </a:lnL>
                     <a:lnR w="9525" cap="flat" cmpd="sng" algn="ctr">
                       <a:solidFill>
-                        <a:srgbClr val="D9D9D9"/>
+                        <a:srgbClr val="D5D9E0"/>
                       </a:solidFill>
                       <a:prstDash val="solid"/>
                       <a:round/>
@@ -5295,7 +5276,7 @@
                     </a:lnR>
                     <a:lnT w="9525" cap="flat" cmpd="sng" algn="ctr">
                       <a:solidFill>
-                        <a:srgbClr val="D9D9D9"/>
+                        <a:srgbClr val="D5D9E0"/>
                       </a:solidFill>
                       <a:prstDash val="solid"/>
                       <a:round/>
@@ -5304,7 +5285,7 @@
                     </a:lnT>
                     <a:lnB w="9525" cap="flat" cmpd="sng" algn="ctr">
                       <a:solidFill>
-                        <a:srgbClr val="D9D9D9"/>
+                        <a:srgbClr val="D5D9E0"/>
                       </a:solidFill>
                       <a:prstDash val="solid"/>
                       <a:round/>
@@ -5325,17 +5306,17 @@
                         <a:buNone/>
                       </a:pPr>
                       <a:r>
-                        <a:rPr lang="en-US" sz="950" dirty="0">
+                        <a:rPr lang="en-US" sz="1050" dirty="0">
                           <a:solidFill>
-                            <a:srgbClr val="202020"/>
+                            <a:srgbClr val="222533"/>
                           </a:solidFill>
                           <a:latin typeface="Calibri" pitchFamily="34" charset="0"/>
-                          <a:ea typeface="Calibri" pitchFamily="34" charset="-122"/>
-                          <a:cs typeface="Calibri" pitchFamily="34" charset="-120"/>
+                          <a:ea typeface="Calibri" pitchFamily="34"/>
+                          <a:cs typeface="Calibri" pitchFamily="34"/>
                         </a:rPr>
                         <a:t>Supervisor approves exception</a:t>
                       </a:r>
-                      <a:endParaRPr lang="en-US" sz="950" dirty="0">
+                      <a:endParaRPr lang="en-US" sz="1050" dirty="0">
                         <a:latin typeface="Calibri" charset="0"/>
                         <a:ea typeface="Calibri" charset="0"/>
                         <a:cs typeface="Calibri" charset="0"/>
@@ -5345,7 +5326,7 @@
                   <a:tcPr marL="91440" marR="91440" marT="45720" marB="45720" anchor="ctr">
                     <a:lnL w="9525" cap="flat" cmpd="sng" algn="ctr">
                       <a:solidFill>
-                        <a:srgbClr val="D9D9D9"/>
+                        <a:srgbClr val="D5D9E0"/>
                       </a:solidFill>
                       <a:prstDash val="solid"/>
                       <a:round/>
@@ -5354,7 +5335,7 @@
                     </a:lnL>
                     <a:lnR w="9525" cap="flat" cmpd="sng" algn="ctr">
                       <a:solidFill>
-                        <a:srgbClr val="D9D9D9"/>
+                        <a:srgbClr val="D5D9E0"/>
                       </a:solidFill>
                       <a:prstDash val="solid"/>
                       <a:round/>
@@ -5363,7 +5344,7 @@
                     </a:lnR>
                     <a:lnT w="9525" cap="flat" cmpd="sng" algn="ctr">
                       <a:solidFill>
-                        <a:srgbClr val="D9D9D9"/>
+                        <a:srgbClr val="D5D9E0"/>
                       </a:solidFill>
                       <a:prstDash val="solid"/>
                       <a:round/>
@@ -5372,7 +5353,7 @@
                     </a:lnT>
                     <a:lnB w="9525" cap="flat" cmpd="sng" algn="ctr">
                       <a:solidFill>
-                        <a:srgbClr val="D9D9D9"/>
+                        <a:srgbClr val="D5D9E0"/>
                       </a:solidFill>
                       <a:prstDash val="solid"/>
                       <a:round/>
@@ -5385,7 +5366,7 @@
                   </a:tcPr>
                 </a:tc>
               </a:tr>
-              <a:tr h="658368">
+              <a:tr h="0">
                 <a:tc>
                   <a:txBody>
                     <a:bodyPr/>
@@ -5395,17 +5376,17 @@
                         <a:buNone/>
                       </a:pPr>
                       <a:r>
-                        <a:rPr lang="en-US" sz="950" dirty="0">
+                        <a:rPr lang="en-US" sz="1050" dirty="0">
                           <a:solidFill>
-                            <a:srgbClr val="202020"/>
+                            <a:srgbClr val="222533"/>
                           </a:solidFill>
                           <a:latin typeface="Calibri" pitchFamily="34" charset="0"/>
-                          <a:ea typeface="Calibri" pitchFamily="34" charset="-122"/>
-                          <a:cs typeface="Calibri" pitchFamily="34" charset="-120"/>
+                          <a:ea typeface="Calibri" pitchFamily="34"/>
+                          <a:cs typeface="Calibri" pitchFamily="34"/>
                         </a:rPr>
                         <a:t>Pending Supervisor Review</a:t>
                       </a:r>
-                      <a:endParaRPr lang="en-US" sz="950" dirty="0">
+                      <a:endParaRPr lang="en-US" sz="1050" dirty="0">
                         <a:latin typeface="Calibri" charset="0"/>
                         <a:ea typeface="Calibri" charset="0"/>
                         <a:cs typeface="Calibri" charset="0"/>
@@ -5415,7 +5396,7 @@
                   <a:tcPr marL="91440" marR="91440" marT="45720" marB="45720" anchor="ctr">
                     <a:lnL w="9525" cap="flat" cmpd="sng" algn="ctr">
                       <a:solidFill>
-                        <a:srgbClr val="D9D9D9"/>
+                        <a:srgbClr val="D5D9E0"/>
                       </a:solidFill>
                       <a:prstDash val="solid"/>
                       <a:round/>
@@ -5424,7 +5405,7 @@
                     </a:lnL>
                     <a:lnR w="9525" cap="flat" cmpd="sng" algn="ctr">
                       <a:solidFill>
-                        <a:srgbClr val="D9D9D9"/>
+                        <a:srgbClr val="D5D9E0"/>
                       </a:solidFill>
                       <a:prstDash val="solid"/>
                       <a:round/>
@@ -5433,7 +5414,7 @@
                     </a:lnR>
                     <a:lnT w="9525" cap="flat" cmpd="sng" algn="ctr">
                       <a:solidFill>
-                        <a:srgbClr val="D9D9D9"/>
+                        <a:srgbClr val="D5D9E0"/>
                       </a:solidFill>
                       <a:prstDash val="solid"/>
                       <a:round/>
@@ -5442,7 +5423,7 @@
                     </a:lnT>
                     <a:lnB w="9525" cap="flat" cmpd="sng" algn="ctr">
                       <a:solidFill>
-                        <a:srgbClr val="D9D9D9"/>
+                        <a:srgbClr val="D5D9E0"/>
                       </a:solidFill>
                       <a:prstDash val="solid"/>
                       <a:round/>
@@ -5450,7 +5431,7 @@
                       <a:tailEnd type="none" w="med" len="med"/>
                     </a:lnB>
                     <a:solidFill>
-                      <a:srgbClr val="F4F6FC"/>
+                      <a:srgbClr val="F7F8FA"/>
                     </a:solidFill>
                   </a:tcPr>
                 </a:tc>
@@ -5463,17 +5444,17 @@
                         <a:buNone/>
                       </a:pPr>
                       <a:r>
-                        <a:rPr lang="en-US" sz="950" dirty="0">
+                        <a:rPr lang="en-US" sz="1050" dirty="0">
                           <a:solidFill>
-                            <a:srgbClr val="202020"/>
+                            <a:srgbClr val="222533"/>
                           </a:solidFill>
                           <a:latin typeface="Calibri" pitchFamily="34" charset="0"/>
-                          <a:ea typeface="Calibri" pitchFamily="34" charset="-122"/>
-                          <a:cs typeface="Calibri" pitchFamily="34" charset="-120"/>
+                          <a:ea typeface="Calibri" pitchFamily="34"/>
+                          <a:cs typeface="Calibri" pitchFamily="34"/>
                         </a:rPr>
                         <a:t>Supervisor records decision</a:t>
                       </a:r>
-                      <a:endParaRPr lang="en-US" sz="950" dirty="0">
+                      <a:endParaRPr lang="en-US" sz="1050" dirty="0">
                         <a:latin typeface="Calibri" charset="0"/>
                         <a:ea typeface="Calibri" charset="0"/>
                         <a:cs typeface="Calibri" charset="0"/>
@@ -5483,7 +5464,7 @@
                   <a:tcPr marL="91440" marR="91440" marT="45720" marB="45720" anchor="ctr">
                     <a:lnL w="9525" cap="flat" cmpd="sng" algn="ctr">
                       <a:solidFill>
-                        <a:srgbClr val="D9D9D9"/>
+                        <a:srgbClr val="D5D9E0"/>
                       </a:solidFill>
                       <a:prstDash val="solid"/>
                       <a:round/>
@@ -5492,7 +5473,7 @@
                     </a:lnL>
                     <a:lnR w="9525" cap="flat" cmpd="sng" algn="ctr">
                       <a:solidFill>
-                        <a:srgbClr val="D9D9D9"/>
+                        <a:srgbClr val="D5D9E0"/>
                       </a:solidFill>
                       <a:prstDash val="solid"/>
                       <a:round/>
@@ -5501,7 +5482,7 @@
                     </a:lnR>
                     <a:lnT w="9525" cap="flat" cmpd="sng" algn="ctr">
                       <a:solidFill>
-                        <a:srgbClr val="D9D9D9"/>
+                        <a:srgbClr val="D5D9E0"/>
                       </a:solidFill>
                       <a:prstDash val="solid"/>
                       <a:round/>
@@ -5510,7 +5491,7 @@
                     </a:lnT>
                     <a:lnB w="9525" cap="flat" cmpd="sng" algn="ctr">
                       <a:solidFill>
-                        <a:srgbClr val="D9D9D9"/>
+                        <a:srgbClr val="D5D9E0"/>
                       </a:solidFill>
                       <a:prstDash val="solid"/>
                       <a:round/>
@@ -5518,7 +5499,7 @@
                       <a:tailEnd type="none" w="med" len="med"/>
                     </a:lnB>
                     <a:solidFill>
-                      <a:srgbClr val="F4F6FC"/>
+                      <a:srgbClr val="F7F8FA"/>
                     </a:solidFill>
                   </a:tcPr>
                 </a:tc>
@@ -5531,17 +5512,17 @@
                         <a:buNone/>
                       </a:pPr>
                       <a:r>
-                        <a:rPr lang="en-US" sz="950" dirty="0">
+                        <a:rPr lang="en-US" sz="1050" dirty="0">
                           <a:solidFill>
-                            <a:srgbClr val="202020"/>
+                            <a:srgbClr val="222533"/>
                           </a:solidFill>
                           <a:latin typeface="Calibri" pitchFamily="34" charset="0"/>
-                          <a:ea typeface="Calibri" pitchFamily="34" charset="-122"/>
-                          <a:cs typeface="Calibri" pitchFamily="34" charset="-120"/>
+                          <a:ea typeface="Calibri" pitchFamily="34"/>
+                          <a:cs typeface="Calibri" pitchFamily="34"/>
                         </a:rPr>
                         <a:t>Supervisor</a:t>
                       </a:r>
-                      <a:endParaRPr lang="en-US" sz="950" dirty="0">
+                      <a:endParaRPr lang="en-US" sz="1050" dirty="0">
                         <a:latin typeface="Calibri" charset="0"/>
                         <a:ea typeface="Calibri" charset="0"/>
                         <a:cs typeface="Calibri" charset="0"/>
@@ -5551,7 +5532,7 @@
                   <a:tcPr marL="91440" marR="91440" marT="45720" marB="45720" anchor="ctr">
                     <a:lnL w="9525" cap="flat" cmpd="sng" algn="ctr">
                       <a:solidFill>
-                        <a:srgbClr val="D9D9D9"/>
+                        <a:srgbClr val="D5D9E0"/>
                       </a:solidFill>
                       <a:prstDash val="solid"/>
                       <a:round/>
@@ -5560,7 +5541,7 @@
                     </a:lnL>
                     <a:lnR w="9525" cap="flat" cmpd="sng" algn="ctr">
                       <a:solidFill>
-                        <a:srgbClr val="D9D9D9"/>
+                        <a:srgbClr val="D5D9E0"/>
                       </a:solidFill>
                       <a:prstDash val="solid"/>
                       <a:round/>
@@ -5569,7 +5550,7 @@
                     </a:lnR>
                     <a:lnT w="9525" cap="flat" cmpd="sng" algn="ctr">
                       <a:solidFill>
-                        <a:srgbClr val="D9D9D9"/>
+                        <a:srgbClr val="D5D9E0"/>
                       </a:solidFill>
                       <a:prstDash val="solid"/>
                       <a:round/>
@@ -5578,7 +5559,7 @@
                     </a:lnT>
                     <a:lnB w="9525" cap="flat" cmpd="sng" algn="ctr">
                       <a:solidFill>
-                        <a:srgbClr val="D9D9D9"/>
+                        <a:srgbClr val="D5D9E0"/>
                       </a:solidFill>
                       <a:prstDash val="solid"/>
                       <a:round/>
@@ -5586,7 +5567,7 @@
                       <a:tailEnd type="none" w="med" len="med"/>
                     </a:lnB>
                     <a:solidFill>
-                      <a:srgbClr val="F4F6FC"/>
+                      <a:srgbClr val="F7F8FA"/>
                     </a:solidFill>
                   </a:tcPr>
                 </a:tc>
@@ -5599,27 +5580,27 @@
                         <a:buNone/>
                       </a:pPr>
                       <a:r>
-                        <a:rPr lang="en-US" sz="950" dirty="0">
+                        <a:rPr lang="en-US" sz="1050" dirty="0">
                           <a:solidFill>
-                            <a:srgbClr val="202020"/>
+                            <a:srgbClr val="222533"/>
                           </a:solidFill>
-                          <a:latin typeface="Calibri" pitchFamily="34" charset="0"/>
-                          <a:ea typeface="Calibri" pitchFamily="34" charset="-122"/>
-                          <a:cs typeface="Calibri" pitchFamily="34" charset="-120"/>
+                          <a:latin typeface="Courier New" pitchFamily="34" charset="0"/>
+                          <a:ea typeface="Courier New" pitchFamily="34"/>
+                          <a:cs typeface="Courier New" pitchFamily="34"/>
                         </a:rPr>
                         <a:t>Rejected</a:t>
                       </a:r>
-                      <a:endParaRPr lang="en-US" sz="950" dirty="0">
-                        <a:latin typeface="Calibri" charset="0"/>
-                        <a:ea typeface="Calibri" charset="0"/>
-                        <a:cs typeface="Calibri" charset="0"/>
+                      <a:endParaRPr lang="en-US" sz="1050" dirty="0">
+                        <a:latin typeface="Courier New" charset="0"/>
+                        <a:ea typeface="Courier New" charset="0"/>
+                        <a:cs typeface="Courier New" charset="0"/>
                       </a:endParaRPr>
                     </a:p>
                   </a:txBody>
                   <a:tcPr marL="91440" marR="91440" marT="45720" marB="45720" anchor="ctr">
                     <a:lnL w="9525" cap="flat" cmpd="sng" algn="ctr">
                       <a:solidFill>
-                        <a:srgbClr val="D9D9D9"/>
+                        <a:srgbClr val="D5D9E0"/>
                       </a:solidFill>
                       <a:prstDash val="solid"/>
                       <a:round/>
@@ -5628,7 +5609,7 @@
                     </a:lnL>
                     <a:lnR w="9525" cap="flat" cmpd="sng" algn="ctr">
                       <a:solidFill>
-                        <a:srgbClr val="D9D9D9"/>
+                        <a:srgbClr val="D5D9E0"/>
                       </a:solidFill>
                       <a:prstDash val="solid"/>
                       <a:round/>
@@ -5637,7 +5618,7 @@
                     </a:lnR>
                     <a:lnT w="9525" cap="flat" cmpd="sng" algn="ctr">
                       <a:solidFill>
-                        <a:srgbClr val="D9D9D9"/>
+                        <a:srgbClr val="D5D9E0"/>
                       </a:solidFill>
                       <a:prstDash val="solid"/>
                       <a:round/>
@@ -5646,7 +5627,7 @@
                     </a:lnT>
                     <a:lnB w="9525" cap="flat" cmpd="sng" algn="ctr">
                       <a:solidFill>
-                        <a:srgbClr val="D9D9D9"/>
+                        <a:srgbClr val="D5D9E0"/>
                       </a:solidFill>
                       <a:prstDash val="solid"/>
                       <a:round/>
@@ -5654,7 +5635,7 @@
                       <a:tailEnd type="none" w="med" len="med"/>
                     </a:lnB>
                     <a:solidFill>
-                      <a:srgbClr val="F4F6FC"/>
+                      <a:srgbClr val="F7F8FA"/>
                     </a:solidFill>
                   </a:tcPr>
                 </a:tc>
@@ -5667,17 +5648,17 @@
                         <a:buNone/>
                       </a:pPr>
                       <a:r>
-                        <a:rPr lang="en-US" sz="950" dirty="0">
+                        <a:rPr lang="en-US" sz="1050" dirty="0">
                           <a:solidFill>
-                            <a:srgbClr val="202020"/>
+                            <a:srgbClr val="222533"/>
                           </a:solidFill>
                           <a:latin typeface="Calibri" pitchFamily="34" charset="0"/>
-                          <a:ea typeface="Calibri" pitchFamily="34" charset="-122"/>
-                          <a:cs typeface="Calibri" pitchFamily="34" charset="-120"/>
+                          <a:ea typeface="Calibri" pitchFamily="34"/>
+                          <a:cs typeface="Calibri" pitchFamily="34"/>
                         </a:rPr>
                         <a:t>Supervisor rejects exception</a:t>
                       </a:r>
-                      <a:endParaRPr lang="en-US" sz="950" dirty="0">
+                      <a:endParaRPr lang="en-US" sz="1050" dirty="0">
                         <a:latin typeface="Calibri" charset="0"/>
                         <a:ea typeface="Calibri" charset="0"/>
                         <a:cs typeface="Calibri" charset="0"/>
@@ -5687,7 +5668,7 @@
                   <a:tcPr marL="91440" marR="91440" marT="45720" marB="45720" anchor="ctr">
                     <a:lnL w="9525" cap="flat" cmpd="sng" algn="ctr">
                       <a:solidFill>
-                        <a:srgbClr val="D9D9D9"/>
+                        <a:srgbClr val="D5D9E0"/>
                       </a:solidFill>
                       <a:prstDash val="solid"/>
                       <a:round/>
@@ -5696,7 +5677,7 @@
                     </a:lnL>
                     <a:lnR w="9525" cap="flat" cmpd="sng" algn="ctr">
                       <a:solidFill>
-                        <a:srgbClr val="D9D9D9"/>
+                        <a:srgbClr val="D5D9E0"/>
                       </a:solidFill>
                       <a:prstDash val="solid"/>
                       <a:round/>
@@ -5705,7 +5686,7 @@
                     </a:lnR>
                     <a:lnT w="9525" cap="flat" cmpd="sng" algn="ctr">
                       <a:solidFill>
-                        <a:srgbClr val="D9D9D9"/>
+                        <a:srgbClr val="D5D9E0"/>
                       </a:solidFill>
                       <a:prstDash val="solid"/>
                       <a:round/>
@@ -5714,7 +5695,7 @@
                     </a:lnT>
                     <a:lnB w="9525" cap="flat" cmpd="sng" algn="ctr">
                       <a:solidFill>
-                        <a:srgbClr val="D9D9D9"/>
+                        <a:srgbClr val="D5D9E0"/>
                       </a:solidFill>
                       <a:prstDash val="solid"/>
                       <a:round/>
@@ -5722,12 +5703,12 @@
                       <a:tailEnd type="none" w="med" len="med"/>
                     </a:lnB>
                     <a:solidFill>
-                      <a:srgbClr val="F4F6FC"/>
+                      <a:srgbClr val="F7F8FA"/>
                     </a:solidFill>
                   </a:tcPr>
                 </a:tc>
               </a:tr>
-              <a:tr h="658368">
+              <a:tr h="0">
                 <a:tc>
                   <a:txBody>
                     <a:bodyPr/>
@@ -5737,17 +5718,17 @@
                         <a:buNone/>
                       </a:pPr>
                       <a:r>
-                        <a:rPr lang="en-US" sz="950" dirty="0">
+                        <a:rPr lang="en-US" sz="1050" dirty="0">
                           <a:solidFill>
-                            <a:srgbClr val="202020"/>
+                            <a:srgbClr val="222533"/>
                           </a:solidFill>
                           <a:latin typeface="Calibri" pitchFamily="34" charset="0"/>
-                          <a:ea typeface="Calibri" pitchFamily="34" charset="-122"/>
-                          <a:cs typeface="Calibri" pitchFamily="34" charset="-120"/>
+                          <a:ea typeface="Calibri" pitchFamily="34"/>
+                          <a:cs typeface="Calibri" pitchFamily="34"/>
                         </a:rPr>
                         <a:t>Approved</a:t>
                       </a:r>
-                      <a:endParaRPr lang="en-US" sz="950" dirty="0">
+                      <a:endParaRPr lang="en-US" sz="1050" dirty="0">
                         <a:latin typeface="Calibri" charset="0"/>
                         <a:ea typeface="Calibri" charset="0"/>
                         <a:cs typeface="Calibri" charset="0"/>
@@ -5757,7 +5738,7 @@
                   <a:tcPr marL="91440" marR="91440" marT="45720" marB="45720" anchor="ctr">
                     <a:lnL w="9525" cap="flat" cmpd="sng" algn="ctr">
                       <a:solidFill>
-                        <a:srgbClr val="D9D9D9"/>
+                        <a:srgbClr val="D5D9E0"/>
                       </a:solidFill>
                       <a:prstDash val="solid"/>
                       <a:round/>
@@ -5766,7 +5747,7 @@
                     </a:lnL>
                     <a:lnR w="9525" cap="flat" cmpd="sng" algn="ctr">
                       <a:solidFill>
-                        <a:srgbClr val="D9D9D9"/>
+                        <a:srgbClr val="D5D9E0"/>
                       </a:solidFill>
                       <a:prstDash val="solid"/>
                       <a:round/>
@@ -5775,7 +5756,7 @@
                     </a:lnR>
                     <a:lnT w="9525" cap="flat" cmpd="sng" algn="ctr">
                       <a:solidFill>
-                        <a:srgbClr val="D9D9D9"/>
+                        <a:srgbClr val="D5D9E0"/>
                       </a:solidFill>
                       <a:prstDash val="solid"/>
                       <a:round/>
@@ -5784,7 +5765,7 @@
                     </a:lnT>
                     <a:lnB w="9525" cap="flat" cmpd="sng" algn="ctr">
                       <a:solidFill>
-                        <a:srgbClr val="D9D9D9"/>
+                        <a:srgbClr val="D5D9E0"/>
                       </a:solidFill>
                       <a:prstDash val="solid"/>
                       <a:round/>
@@ -5805,17 +5786,17 @@
                         <a:buNone/>
                       </a:pPr>
                       <a:r>
-                        <a:rPr lang="en-US" sz="950" dirty="0">
+                        <a:rPr lang="en-US" sz="1050" dirty="0">
                           <a:solidFill>
-                            <a:srgbClr val="202020"/>
+                            <a:srgbClr val="222533"/>
                           </a:solidFill>
                           <a:latin typeface="Calibri" pitchFamily="34" charset="0"/>
-                          <a:ea typeface="Calibri" pitchFamily="34" charset="-122"/>
-                          <a:cs typeface="Calibri" pitchFamily="34" charset="-120"/>
+                          <a:ea typeface="Calibri" pitchFamily="34"/>
+                          <a:cs typeface="Calibri" pitchFamily="34"/>
                         </a:rPr>
                         <a:t>Item received / resolution issued</a:t>
                       </a:r>
-                      <a:endParaRPr lang="en-US" sz="950" dirty="0">
+                      <a:endParaRPr lang="en-US" sz="1050" dirty="0">
                         <a:latin typeface="Calibri" charset="0"/>
                         <a:ea typeface="Calibri" charset="0"/>
                         <a:cs typeface="Calibri" charset="0"/>
@@ -5825,7 +5806,7 @@
                   <a:tcPr marL="91440" marR="91440" marT="45720" marB="45720" anchor="ctr">
                     <a:lnL w="9525" cap="flat" cmpd="sng" algn="ctr">
                       <a:solidFill>
-                        <a:srgbClr val="D9D9D9"/>
+                        <a:srgbClr val="D5D9E0"/>
                       </a:solidFill>
                       <a:prstDash val="solid"/>
                       <a:round/>
@@ -5834,7 +5815,7 @@
                     </a:lnL>
                     <a:lnR w="9525" cap="flat" cmpd="sng" algn="ctr">
                       <a:solidFill>
-                        <a:srgbClr val="D9D9D9"/>
+                        <a:srgbClr val="D5D9E0"/>
                       </a:solidFill>
                       <a:prstDash val="solid"/>
                       <a:round/>
@@ -5843,7 +5824,7 @@
                     </a:lnR>
                     <a:lnT w="9525" cap="flat" cmpd="sng" algn="ctr">
                       <a:solidFill>
-                        <a:srgbClr val="D9D9D9"/>
+                        <a:srgbClr val="D5D9E0"/>
                       </a:solidFill>
                       <a:prstDash val="solid"/>
                       <a:round/>
@@ -5852,7 +5833,7 @@
                     </a:lnT>
                     <a:lnB w="9525" cap="flat" cmpd="sng" algn="ctr">
                       <a:solidFill>
-                        <a:srgbClr val="D9D9D9"/>
+                        <a:srgbClr val="D5D9E0"/>
                       </a:solidFill>
                       <a:prstDash val="solid"/>
                       <a:round/>
@@ -5873,17 +5854,17 @@
                         <a:buNone/>
                       </a:pPr>
                       <a:r>
-                        <a:rPr lang="en-US" sz="950" dirty="0">
+                        <a:rPr lang="en-US" sz="1050" dirty="0">
                           <a:solidFill>
-                            <a:srgbClr val="202020"/>
+                            <a:srgbClr val="222533"/>
                           </a:solidFill>
                           <a:latin typeface="Calibri" pitchFamily="34" charset="0"/>
-                          <a:ea typeface="Calibri" pitchFamily="34" charset="-122"/>
-                          <a:cs typeface="Calibri" pitchFamily="34" charset="-120"/>
+                          <a:ea typeface="Calibri" pitchFamily="34"/>
+                          <a:cs typeface="Calibri" pitchFamily="34"/>
                         </a:rPr>
                         <a:t>Customer / System</a:t>
                       </a:r>
-                      <a:endParaRPr lang="en-US" sz="950" dirty="0">
+                      <a:endParaRPr lang="en-US" sz="1050" dirty="0">
                         <a:latin typeface="Calibri" charset="0"/>
                         <a:ea typeface="Calibri" charset="0"/>
                         <a:cs typeface="Calibri" charset="0"/>
@@ -5893,7 +5874,7 @@
                   <a:tcPr marL="91440" marR="91440" marT="45720" marB="45720" anchor="ctr">
                     <a:lnL w="9525" cap="flat" cmpd="sng" algn="ctr">
                       <a:solidFill>
-                        <a:srgbClr val="D9D9D9"/>
+                        <a:srgbClr val="D5D9E0"/>
                       </a:solidFill>
                       <a:prstDash val="solid"/>
                       <a:round/>
@@ -5902,7 +5883,7 @@
                     </a:lnL>
                     <a:lnR w="9525" cap="flat" cmpd="sng" algn="ctr">
                       <a:solidFill>
-                        <a:srgbClr val="D9D9D9"/>
+                        <a:srgbClr val="D5D9E0"/>
                       </a:solidFill>
                       <a:prstDash val="solid"/>
                       <a:round/>
@@ -5911,7 +5892,7 @@
                     </a:lnR>
                     <a:lnT w="9525" cap="flat" cmpd="sng" algn="ctr">
                       <a:solidFill>
-                        <a:srgbClr val="D9D9D9"/>
+                        <a:srgbClr val="D5D9E0"/>
                       </a:solidFill>
                       <a:prstDash val="solid"/>
                       <a:round/>
@@ -5920,7 +5901,7 @@
                     </a:lnT>
                     <a:lnB w="9525" cap="flat" cmpd="sng" algn="ctr">
                       <a:solidFill>
-                        <a:srgbClr val="D9D9D9"/>
+                        <a:srgbClr val="D5D9E0"/>
                       </a:solidFill>
                       <a:prstDash val="solid"/>
                       <a:round/>
@@ -5941,27 +5922,27 @@
                         <a:buNone/>
                       </a:pPr>
                       <a:r>
-                        <a:rPr lang="en-US" sz="950" dirty="0">
+                        <a:rPr lang="en-US" sz="1050" dirty="0">
                           <a:solidFill>
-                            <a:srgbClr val="202020"/>
+                            <a:srgbClr val="222533"/>
                           </a:solidFill>
-                          <a:latin typeface="Calibri" pitchFamily="34" charset="0"/>
-                          <a:ea typeface="Calibri" pitchFamily="34" charset="-122"/>
-                          <a:cs typeface="Calibri" pitchFamily="34" charset="-120"/>
+                          <a:latin typeface="Courier New" pitchFamily="34" charset="0"/>
+                          <a:ea typeface="Courier New" pitchFamily="34"/>
+                          <a:cs typeface="Courier New" pitchFamily="34"/>
                         </a:rPr>
                         <a:t>Completed</a:t>
                       </a:r>
-                      <a:endParaRPr lang="en-US" sz="950" dirty="0">
-                        <a:latin typeface="Calibri" charset="0"/>
-                        <a:ea typeface="Calibri" charset="0"/>
-                        <a:cs typeface="Calibri" charset="0"/>
+                      <a:endParaRPr lang="en-US" sz="1050" dirty="0">
+                        <a:latin typeface="Courier New" charset="0"/>
+                        <a:ea typeface="Courier New" charset="0"/>
+                        <a:cs typeface="Courier New" charset="0"/>
                       </a:endParaRPr>
                     </a:p>
                   </a:txBody>
                   <a:tcPr marL="91440" marR="91440" marT="45720" marB="45720" anchor="ctr">
                     <a:lnL w="9525" cap="flat" cmpd="sng" algn="ctr">
                       <a:solidFill>
-                        <a:srgbClr val="D9D9D9"/>
+                        <a:srgbClr val="D5D9E0"/>
                       </a:solidFill>
                       <a:prstDash val="solid"/>
                       <a:round/>
@@ -5970,7 +5951,7 @@
                     </a:lnL>
                     <a:lnR w="9525" cap="flat" cmpd="sng" algn="ctr">
                       <a:solidFill>
-                        <a:srgbClr val="D9D9D9"/>
+                        <a:srgbClr val="D5D9E0"/>
                       </a:solidFill>
                       <a:prstDash val="solid"/>
                       <a:round/>
@@ -5979,7 +5960,7 @@
                     </a:lnR>
                     <a:lnT w="9525" cap="flat" cmpd="sng" algn="ctr">
                       <a:solidFill>
-                        <a:srgbClr val="D9D9D9"/>
+                        <a:srgbClr val="D5D9E0"/>
                       </a:solidFill>
                       <a:prstDash val="solid"/>
                       <a:round/>
@@ -5988,7 +5969,7 @@
                     </a:lnT>
                     <a:lnB w="9525" cap="flat" cmpd="sng" algn="ctr">
                       <a:solidFill>
-                        <a:srgbClr val="D9D9D9"/>
+                        <a:srgbClr val="D5D9E0"/>
                       </a:solidFill>
                       <a:prstDash val="solid"/>
                       <a:round/>
@@ -6009,17 +5990,17 @@
                         <a:buNone/>
                       </a:pPr>
                       <a:r>
-                        <a:rPr lang="en-US" sz="950" dirty="0">
+                        <a:rPr lang="en-US" sz="1050" dirty="0">
                           <a:solidFill>
-                            <a:srgbClr val="202020"/>
+                            <a:srgbClr val="222533"/>
                           </a:solidFill>
                           <a:latin typeface="Calibri" pitchFamily="34" charset="0"/>
-                          <a:ea typeface="Calibri" pitchFamily="34" charset="-122"/>
-                          <a:cs typeface="Calibri" pitchFamily="34" charset="-120"/>
+                          <a:ea typeface="Calibri" pitchFamily="34"/>
+                          <a:cs typeface="Calibri" pitchFamily="34"/>
                         </a:rPr>
                         <a:t>Marks final resolution of the request</a:t>
                       </a:r>
-                      <a:endParaRPr lang="en-US" sz="950" dirty="0">
+                      <a:endParaRPr lang="en-US" sz="1050" dirty="0">
                         <a:latin typeface="Calibri" charset="0"/>
                         <a:ea typeface="Calibri" charset="0"/>
                         <a:cs typeface="Calibri" charset="0"/>
@@ -6029,7 +6010,7 @@
                   <a:tcPr marL="91440" marR="91440" marT="45720" marB="45720" anchor="ctr">
                     <a:lnL w="9525" cap="flat" cmpd="sng" algn="ctr">
                       <a:solidFill>
-                        <a:srgbClr val="D9D9D9"/>
+                        <a:srgbClr val="D5D9E0"/>
                       </a:solidFill>
                       <a:prstDash val="solid"/>
                       <a:round/>
@@ -6038,7 +6019,7 @@
                     </a:lnL>
                     <a:lnR w="9525" cap="flat" cmpd="sng" algn="ctr">
                       <a:solidFill>
-                        <a:srgbClr val="D9D9D9"/>
+                        <a:srgbClr val="D5D9E0"/>
                       </a:solidFill>
                       <a:prstDash val="solid"/>
                       <a:round/>
@@ -6047,7 +6028,7 @@
                     </a:lnR>
                     <a:lnT w="9525" cap="flat" cmpd="sng" algn="ctr">
                       <a:solidFill>
-                        <a:srgbClr val="D9D9D9"/>
+                        <a:srgbClr val="D5D9E0"/>
                       </a:solidFill>
                       <a:prstDash val="solid"/>
                       <a:round/>
@@ -6056,7 +6037,7 @@
                     </a:lnT>
                     <a:lnB w="9525" cap="flat" cmpd="sng" algn="ctr">
                       <a:solidFill>
-                        <a:srgbClr val="D9D9D9"/>
+                        <a:srgbClr val="D5D9E0"/>
                       </a:solidFill>
                       <a:prstDash val="solid"/>
                       <a:round/>
